--- a/slides/agentic_pieas_erp_sync.pptx
+++ b/slides/agentic_pieas_erp_sync.pptx
@@ -9759,11 +9759,8 @@
             <a:off x="2862072" y="2578608"/>
             <a:ext cx="493776" cy="493776"/>
           </a:xfrm>
-          <a:prstGeom prst="arc">
-            <a:avLst>
-              <a:gd name="adj1" fmla="val 10800000"/>
-              <a:gd name="adj2" fmla="val 21600000"/>
-            </a:avLst>
+          <a:prstGeom prst="ellipse">
+            <a:avLst/>
           </a:prstGeom>
           <a:ln w="50800">
             <a:solidFill>
@@ -9776,6 +9773,26 @@
       <p:sp>
         <p:nvSpPr>
           <p:cNvPr id="7" name="Shape 5"/>
+          <p:cNvSpPr/>
+          <p:nvPr/>
+        </p:nvSpPr>
+        <p:spPr>
+          <a:xfrm>
+            <a:off x="2816352" y="2825496"/>
+            <a:ext cx="585216" cy="292608"/>
+          </a:xfrm>
+          <a:prstGeom prst="rect">
+            <a:avLst/>
+          </a:prstGeom>
+          <a:solidFill>
+            <a:srgbClr val="FFFFFF"/>
+          </a:solidFill>
+          <a:ln/>
+        </p:spPr>
+      </p:sp>
+      <p:sp>
+        <p:nvSpPr>
+          <p:cNvPr id="8" name="Shape 6"/>
           <p:cNvSpPr/>
           <p:nvPr/>
         </p:nvSpPr>
@@ -9804,7 +9821,7 @@
       </p:sp>
       <p:sp>
         <p:nvSpPr>
-          <p:cNvPr id="8" name="Shape 6"/>
+          <p:cNvPr id="9" name="Shape 7"/>
           <p:cNvSpPr/>
           <p:nvPr/>
         </p:nvSpPr>
@@ -9824,7 +9841,7 @@
       </p:sp>
       <p:sp>
         <p:nvSpPr>
-          <p:cNvPr id="9" name="Text 7"/>
+          <p:cNvPr id="10" name="Text 8"/>
           <p:cNvSpPr/>
           <p:nvPr/>
         </p:nvSpPr>
@@ -9863,7 +9880,7 @@
       </p:sp>
       <p:sp>
         <p:nvSpPr>
-          <p:cNvPr id="10" name="Text 8"/>
+          <p:cNvPr id="11" name="Text 9"/>
           <p:cNvSpPr/>
           <p:nvPr/>
         </p:nvSpPr>
@@ -9902,7 +9919,7 @@
       </p:sp>
       <p:sp>
         <p:nvSpPr>
-          <p:cNvPr id="11" name="Text 9"/>
+          <p:cNvPr id="12" name="Text 10"/>
           <p:cNvSpPr/>
           <p:nvPr/>
         </p:nvSpPr>
@@ -9941,7 +9958,7 @@
       </p:sp>
       <p:sp>
         <p:nvSpPr>
-          <p:cNvPr id="12" name="Shape 10"/>
+          <p:cNvPr id="13" name="Shape 11"/>
           <p:cNvSpPr/>
           <p:nvPr/>
         </p:nvSpPr>
@@ -9975,7 +9992,7 @@
       </p:sp>
       <p:sp>
         <p:nvSpPr>
-          <p:cNvPr id="13" name="Text 11"/>
+          <p:cNvPr id="14" name="Text 12"/>
           <p:cNvSpPr/>
           <p:nvPr/>
         </p:nvSpPr>
@@ -10014,7 +10031,7 @@
       </p:sp>
       <p:sp>
         <p:nvSpPr>
-          <p:cNvPr id="14" name="Shape 12"/>
+          <p:cNvPr id="15" name="Shape 13"/>
           <p:cNvSpPr/>
           <p:nvPr/>
         </p:nvSpPr>
@@ -10038,7 +10055,7 @@
       </p:sp>
       <p:sp>
         <p:nvSpPr>
-          <p:cNvPr id="15" name="Shape 13"/>
+          <p:cNvPr id="16" name="Shape 14"/>
           <p:cNvSpPr/>
           <p:nvPr/>
         </p:nvSpPr>
@@ -10062,7 +10079,7 @@
       </p:sp>
       <p:sp>
         <p:nvSpPr>
-          <p:cNvPr id="16" name="Shape 14"/>
+          <p:cNvPr id="17" name="Shape 15"/>
           <p:cNvSpPr/>
           <p:nvPr/>
         </p:nvSpPr>
@@ -10086,7 +10103,7 @@
       </p:sp>
       <p:sp>
         <p:nvSpPr>
-          <p:cNvPr id="17" name="Shape 15"/>
+          <p:cNvPr id="18" name="Shape 16"/>
           <p:cNvSpPr/>
           <p:nvPr/>
         </p:nvSpPr>
@@ -10111,7 +10128,7 @@
       </p:sp>
       <p:sp>
         <p:nvSpPr>
-          <p:cNvPr id="18" name="Shape 16"/>
+          <p:cNvPr id="19" name="Shape 17"/>
           <p:cNvSpPr/>
           <p:nvPr/>
         </p:nvSpPr>
@@ -10136,7 +10153,7 @@
       </p:sp>
       <p:sp>
         <p:nvSpPr>
-          <p:cNvPr id="19" name="Shape 17"/>
+          <p:cNvPr id="20" name="Shape 18"/>
           <p:cNvSpPr/>
           <p:nvPr/>
         </p:nvSpPr>
@@ -10161,7 +10178,7 @@
       </p:sp>
       <p:sp>
         <p:nvSpPr>
-          <p:cNvPr id="20" name="Shape 18"/>
+          <p:cNvPr id="21" name="Shape 19"/>
           <p:cNvSpPr/>
           <p:nvPr/>
         </p:nvSpPr>
@@ -10186,7 +10203,7 @@
       </p:sp>
       <p:sp>
         <p:nvSpPr>
-          <p:cNvPr id="21" name="Text 19"/>
+          <p:cNvPr id="22" name="Text 20"/>
           <p:cNvSpPr/>
           <p:nvPr/>
         </p:nvSpPr>
@@ -10225,7 +10242,7 @@
       </p:sp>
       <p:sp>
         <p:nvSpPr>
-          <p:cNvPr id="22" name="Text 20"/>
+          <p:cNvPr id="23" name="Text 21"/>
           <p:cNvSpPr/>
           <p:nvPr/>
         </p:nvSpPr>
@@ -10264,7 +10281,7 @@
       </p:sp>
       <p:sp>
         <p:nvSpPr>
-          <p:cNvPr id="23" name="Text 21"/>
+          <p:cNvPr id="24" name="Text 22"/>
           <p:cNvSpPr/>
           <p:nvPr/>
         </p:nvSpPr>
@@ -10303,7 +10320,7 @@
       </p:sp>
       <p:sp>
         <p:nvSpPr>
-          <p:cNvPr id="24" name="Shape 22"/>
+          <p:cNvPr id="25" name="Shape 23"/>
           <p:cNvSpPr/>
           <p:nvPr/>
         </p:nvSpPr>
@@ -10332,7 +10349,7 @@
       </p:sp>
       <p:sp>
         <p:nvSpPr>
-          <p:cNvPr id="25" name="Text 23"/>
+          <p:cNvPr id="26" name="Text 24"/>
           <p:cNvSpPr/>
           <p:nvPr/>
         </p:nvSpPr>
@@ -10371,7 +10388,7 @@
       </p:sp>
       <p:sp>
         <p:nvSpPr>
-          <p:cNvPr id="26" name="Text 24"/>
+          <p:cNvPr id="27" name="Text 25"/>
           <p:cNvSpPr/>
           <p:nvPr/>
         </p:nvSpPr>
@@ -10410,7 +10427,7 @@
       </p:sp>
       <p:sp>
         <p:nvSpPr>
-          <p:cNvPr id="27" name="Text 25"/>
+          <p:cNvPr id="28" name="Text 26"/>
           <p:cNvSpPr/>
           <p:nvPr/>
         </p:nvSpPr>

--- a/slides/agentic_pieas_erp_sync.pptx
+++ b/slides/agentic_pieas_erp_sync.pptx
@@ -4,6 +4,9 @@
   <p:sldMasterIdLst>
     <p:sldMasterId id="2147483648" r:id="rId1"/>
   </p:sldMasterIdLst>
+  <p:notesMasterIdLst>
+    <p:notesMasterId r:id="rId16"/>
+  </p:notesMasterIdLst>
   <p:sldIdLst>
     <p:sldId id="256" r:id="rId2"/>
     <p:sldId id="257" r:id="rId3"/>
@@ -20,9 +23,6 @@
     <p:sldId id="268" r:id="rId14"/>
     <p:sldId id="269" r:id="rId15"/>
   </p:sldIdLst>
-  <p:notesMasterIdLst>
-    <p:notesMasterId r:id="rId16"/>
-  </p:notesMasterIdLst>
   <p:sldSz cx="12192000" cy="6858000"/>
   <p:notesSz cx="6858000" cy="12192000"/>
   <p:defaultTextStyle>
@@ -117,6 +117,11 @@
       </a:defRPr>
     </a:lvl9pPr>
   </p:defaultTextStyle>
+  <p:extLst>
+    <p:ext uri="{EFAFB233-063F-42B5-8137-9DF3F51BA10A}">
+      <p15:sldGuideLst xmlns:p15="http://schemas.microsoft.com/office/powerpoint/2012/main"/>
+    </p:ext>
+  </p:extLst>
 </p:presentation>
 </file>
 
@@ -142,234 +147,10 @@
           <a:chExt cx="0" cy="0"/>
         </a:xfrm>
       </p:grpSpPr>
-      <p:sp>
-        <p:nvSpPr>
-          <p:cNvPr id="2" name="Header Placeholder 1"/>
-          <p:cNvSpPr>
-            <a:spLocks noGrp="1"/>
-          </p:cNvSpPr>
-          <p:nvPr>
-            <p:ph type="hdr" sz="quarter"/>
-          </p:nvPr>
-        </p:nvSpPr>
-        <p:spPr>
-          <a:xfrm>
-            <a:off x="0" y="0"/>
-            <a:ext cx="2971800" cy="458788"/>
-          </a:xfrm>
-          <a:prstGeom prst="rect">
-            <a:avLst/>
-          </a:prstGeom>
-        </p:spPr>
-        <p:txBody>
-          <a:bodyPr vert="horz" lIns="91440" tIns="45720" rIns="91440" bIns="45720" rtlCol="0"/>
-          <a:lstStyle>
-            <a:lvl1pPr algn="l">
-              <a:defRPr sz="1200"/>
-            </a:lvl1pPr>
-          </a:lstStyle>
-          <a:p>
-            <a:endParaRPr lang="en-US"/>
-          </a:p>
-        </p:txBody>
-      </p:sp>
-      <p:sp>
-        <p:nvSpPr>
-          <p:cNvPr id="3" name="Date Placeholder 2"/>
-          <p:cNvSpPr>
-            <a:spLocks noGrp="1"/>
-          </p:cNvSpPr>
-          <p:nvPr>
-            <p:ph type="dt" idx="1"/>
-          </p:nvPr>
-        </p:nvSpPr>
-        <p:spPr>
-          <a:xfrm>
-            <a:off x="3884613" y="0"/>
-            <a:ext cx="2971800" cy="458788"/>
-          </a:xfrm>
-          <a:prstGeom prst="rect">
-            <a:avLst/>
-          </a:prstGeom>
-        </p:spPr>
-        <p:txBody>
-          <a:bodyPr vert="horz" lIns="91440" tIns="45720" rIns="91440" bIns="45720" rtlCol="0"/>
-          <a:lstStyle>
-            <a:lvl1pPr algn="r">
-              <a:defRPr sz="1200"/>
-            </a:lvl1pPr>
-          </a:lstStyle>
-          <a:p>
-            <a:fld id="{5282F153-3F37-0F45-9E97-73ACFA13230C}" type="datetimeFigureOut">
-              <a:rPr lang="en-US"/>
-              <a:t>7/23/19</a:t>
-            </a:fld>
-            <a:endParaRPr lang="en-US"/>
-          </a:p>
-        </p:txBody>
-      </p:sp>
-      <p:sp>
-        <p:nvSpPr>
-          <p:cNvPr id="4" name="Slide Image Placeholder 3"/>
-          <p:cNvSpPr>
-            <a:spLocks noGrp="1" noRot="1" noChangeAspect="1"/>
-          </p:cNvSpPr>
-          <p:nvPr>
-            <p:ph type="sldImg" idx="2"/>
-          </p:nvPr>
-        </p:nvSpPr>
-        <p:spPr>
-          <a:xfrm>
-            <a:off x="685800" y="1143000"/>
-            <a:ext cx="5486400" cy="3086100"/>
-          </a:xfrm>
-          <a:prstGeom prst="rect">
-            <a:avLst/>
-          </a:prstGeom>
-          <a:noFill/>
-          <a:ln w="12700">
-            <a:solidFill>
-              <a:prstClr val="black"/>
-            </a:solidFill>
-          </a:ln>
-        </p:spPr>
-        <p:txBody>
-          <a:bodyPr vert="horz" lIns="91440" tIns="45720" rIns="91440" bIns="45720" rtlCol="0" anchor="ctr"/>
-          <a:lstStyle/>
-          <a:p>
-            <a:endParaRPr lang="en-US"/>
-          </a:p>
-        </p:txBody>
-      </p:sp>
-      <p:sp>
-        <p:nvSpPr>
-          <p:cNvPr id="5" name="Notes Placeholder 4"/>
-          <p:cNvSpPr>
-            <a:spLocks noGrp="1"/>
-          </p:cNvSpPr>
-          <p:nvPr>
-            <p:ph type="body" sz="quarter" idx="3"/>
-          </p:nvPr>
-        </p:nvSpPr>
-        <p:spPr>
-          <a:xfrm>
-            <a:off x="685800" y="4400550"/>
-            <a:ext cx="5486400" cy="3600450"/>
-          </a:xfrm>
-          <a:prstGeom prst="rect">
-            <a:avLst/>
-          </a:prstGeom>
-        </p:spPr>
-        <p:txBody>
-          <a:bodyPr vert="horz" lIns="91440" tIns="45720" rIns="91440" bIns="45720" rtlCol="0"/>
-          <a:lstStyle/>
-          <a:p>
-            <a:pPr lvl="0"/>
-            <a:r>
-              <a:rPr lang="en-US"/>
-              <a:t>Click to edit Master text styles</a:t>
-            </a:r>
-          </a:p>
-          <a:p>
-            <a:pPr lvl="1"/>
-            <a:r>
-              <a:rPr lang="en-US"/>
-              <a:t>Second level</a:t>
-            </a:r>
-          </a:p>
-          <a:p>
-            <a:pPr lvl="2"/>
-            <a:r>
-              <a:rPr lang="en-US"/>
-              <a:t>Third level</a:t>
-            </a:r>
-          </a:p>
-          <a:p>
-            <a:pPr lvl="3"/>
-            <a:r>
-              <a:rPr lang="en-US"/>
-              <a:t>Fourth level</a:t>
-            </a:r>
-          </a:p>
-          <a:p>
-            <a:pPr lvl="4"/>
-            <a:r>
-              <a:rPr lang="en-US"/>
-              <a:t>Fifth level</a:t>
-            </a:r>
-          </a:p>
-        </p:txBody>
-      </p:sp>
-      <p:sp>
-        <p:nvSpPr>
-          <p:cNvPr id="6" name="Footer Placeholder 5"/>
-          <p:cNvSpPr>
-            <a:spLocks noGrp="1"/>
-          </p:cNvSpPr>
-          <p:nvPr>
-            <p:ph type="ftr" sz="quarter" idx="4"/>
-          </p:nvPr>
-        </p:nvSpPr>
-        <p:spPr>
-          <a:xfrm>
-            <a:off x="0" y="8685213"/>
-            <a:ext cx="2971800" cy="458787"/>
-          </a:xfrm>
-          <a:prstGeom prst="rect">
-            <a:avLst/>
-          </a:prstGeom>
-        </p:spPr>
-        <p:txBody>
-          <a:bodyPr vert="horz" lIns="91440" tIns="45720" rIns="91440" bIns="45720" rtlCol="0" anchor="b"/>
-          <a:lstStyle>
-            <a:lvl1pPr algn="l">
-              <a:defRPr sz="1200"/>
-            </a:lvl1pPr>
-          </a:lstStyle>
-          <a:p>
-            <a:endParaRPr lang="en-US"/>
-          </a:p>
-        </p:txBody>
-      </p:sp>
-      <p:sp>
-        <p:nvSpPr>
-          <p:cNvPr id="7" name="Slide Number Placeholder 6"/>
-          <p:cNvSpPr>
-            <a:spLocks noGrp="1"/>
-          </p:cNvSpPr>
-          <p:nvPr>
-            <p:ph type="sldNum" sz="quarter" idx="5"/>
-          </p:nvPr>
-        </p:nvSpPr>
-        <p:spPr>
-          <a:xfrm>
-            <a:off x="3884613" y="8685213"/>
-            <a:ext cx="2971800" cy="458787"/>
-          </a:xfrm>
-          <a:prstGeom prst="rect">
-            <a:avLst/>
-          </a:prstGeom>
-        </p:spPr>
-        <p:txBody>
-          <a:bodyPr vert="horz" lIns="91440" tIns="45720" rIns="91440" bIns="45720" rtlCol="0" anchor="b"/>
-          <a:lstStyle>
-            <a:lvl1pPr algn="r">
-              <a:defRPr sz="1200"/>
-            </a:lvl1pPr>
-          </a:lstStyle>
-          <a:p>
-            <a:fld id="{CE5E9CC1-C706-0F49-92D6-E571CC5EEA8F}" type="slidenum">
-              <a:rPr lang="en-US"/>
-              <a:t>‹#›</a:t>
-            </a:fld>
-            <a:endParaRPr lang="en-US"/>
-          </a:p>
-        </p:txBody>
-      </p:sp>
     </p:spTree>
     <p:extLst>
       <p:ext uri="{BB962C8B-B14F-4D97-AF65-F5344CB8AC3E}">
-        <p14:creationId xmlns:p14="http://schemas.microsoft.com/office/powerpoint/2010/main" val="1024086991"/>
+        <p14:creationId xmlns:p14="http://schemas.microsoft.com/office/powerpoint/2010/main" val="3199196312"/>
       </p:ext>
     </p:extLst>
   </p:cSld>
@@ -513,10 +294,6 @@
           <a:bodyPr/>
           <a:lstStyle/>
           <a:p>
-            <a:r>
-              <a:rPr lang="en-US" dirty="0"/>
-              <a:t/>
-            </a:r>
             <a:endParaRPr lang="en-US" dirty="0"/>
           </a:p>
         </p:txBody>
@@ -601,10 +378,6 @@
           <a:bodyPr/>
           <a:lstStyle/>
           <a:p>
-            <a:r>
-              <a:rPr lang="en-US" dirty="0"/>
-              <a:t/>
-            </a:r>
             <a:endParaRPr lang="en-US" dirty="0"/>
           </a:p>
         </p:txBody>
@@ -689,10 +462,6 @@
           <a:bodyPr/>
           <a:lstStyle/>
           <a:p>
-            <a:r>
-              <a:rPr lang="en-US" dirty="0"/>
-              <a:t/>
-            </a:r>
             <a:endParaRPr lang="en-US" dirty="0"/>
           </a:p>
         </p:txBody>
@@ -777,10 +546,6 @@
           <a:bodyPr/>
           <a:lstStyle/>
           <a:p>
-            <a:r>
-              <a:rPr lang="en-US" dirty="0"/>
-              <a:t/>
-            </a:r>
             <a:endParaRPr lang="en-US" dirty="0"/>
           </a:p>
         </p:txBody>
@@ -865,10 +630,6 @@
           <a:bodyPr/>
           <a:lstStyle/>
           <a:p>
-            <a:r>
-              <a:rPr lang="en-US" dirty="0"/>
-              <a:t/>
-            </a:r>
             <a:endParaRPr lang="en-US" dirty="0"/>
           </a:p>
         </p:txBody>
@@ -953,10 +714,6 @@
           <a:bodyPr/>
           <a:lstStyle/>
           <a:p>
-            <a:r>
-              <a:rPr lang="en-US" dirty="0"/>
-              <a:t/>
-            </a:r>
             <a:endParaRPr lang="en-US" dirty="0"/>
           </a:p>
         </p:txBody>
@@ -1041,10 +798,6 @@
           <a:bodyPr/>
           <a:lstStyle/>
           <a:p>
-            <a:r>
-              <a:rPr lang="en-US" dirty="0"/>
-              <a:t/>
-            </a:r>
             <a:endParaRPr lang="en-US" dirty="0"/>
           </a:p>
         </p:txBody>
@@ -1129,10 +882,6 @@
           <a:bodyPr/>
           <a:lstStyle/>
           <a:p>
-            <a:r>
-              <a:rPr lang="en-US" dirty="0"/>
-              <a:t/>
-            </a:r>
             <a:endParaRPr lang="en-US" dirty="0"/>
           </a:p>
         </p:txBody>
@@ -1217,10 +966,6 @@
           <a:bodyPr/>
           <a:lstStyle/>
           <a:p>
-            <a:r>
-              <a:rPr lang="en-US" dirty="0"/>
-              <a:t/>
-            </a:r>
             <a:endParaRPr lang="en-US" dirty="0"/>
           </a:p>
         </p:txBody>
@@ -1305,10 +1050,6 @@
           <a:bodyPr/>
           <a:lstStyle/>
           <a:p>
-            <a:r>
-              <a:rPr lang="en-US" dirty="0"/>
-              <a:t/>
-            </a:r>
             <a:endParaRPr lang="en-US" dirty="0"/>
           </a:p>
         </p:txBody>
@@ -1393,10 +1134,6 @@
           <a:bodyPr/>
           <a:lstStyle/>
           <a:p>
-            <a:r>
-              <a:rPr lang="en-US" dirty="0"/>
-              <a:t/>
-            </a:r>
             <a:endParaRPr lang="en-US" dirty="0"/>
           </a:p>
         </p:txBody>
@@ -1481,10 +1218,6 @@
           <a:bodyPr/>
           <a:lstStyle/>
           <a:p>
-            <a:r>
-              <a:rPr lang="en-US" dirty="0"/>
-              <a:t/>
-            </a:r>
             <a:endParaRPr lang="en-US" dirty="0"/>
           </a:p>
         </p:txBody>
@@ -1569,10 +1302,6 @@
           <a:bodyPr/>
           <a:lstStyle/>
           <a:p>
-            <a:r>
-              <a:rPr lang="en-US" dirty="0"/>
-              <a:t/>
-            </a:r>
             <a:endParaRPr lang="en-US" dirty="0"/>
           </a:p>
         </p:txBody>
@@ -1657,10 +1386,6 @@
           <a:bodyPr/>
           <a:lstStyle/>
           <a:p>
-            <a:r>
-              <a:rPr lang="en-US" dirty="0"/>
-              <a:t/>
-            </a:r>
             <a:endParaRPr lang="en-US" dirty="0"/>
           </a:p>
         </p:txBody>
@@ -1734,6 +1459,11 @@
 <file path=ppt/slideMasters/slideMaster1.xml><?xml version="1.0" encoding="utf-8"?>
 <p:sldMaster xmlns:a="http://schemas.openxmlformats.org/drawingml/2006/main" xmlns:r="http://schemas.openxmlformats.org/officeDocument/2006/relationships" xmlns:p="http://schemas.openxmlformats.org/presentationml/2006/main">
   <p:cSld>
+    <p:bg>
+      <p:bgRef idx="1001">
+        <a:schemeClr val="bg1"/>
+      </p:bgRef>
+    </p:bg>
     <p:spTree>
       <p:nvGrpSpPr>
         <p:cNvPr id="1" name=""/>
@@ -2016,6 +1746,7 @@
         <a:solidFill>
           <a:srgbClr val="0B1330"/>
         </a:solidFill>
+        <a:effectLst/>
       </p:bgPr>
     </p:bg>
     <p:spTree>
@@ -2214,7 +1945,7 @@
           <a:bodyPr wrap="square" lIns="0" tIns="0" rIns="0" bIns="0" rtlCol="0" anchor="ctr"/>
           <a:lstStyle/>
           <a:p>
-            <a:pPr algn="ctr" indent="0" marL="0">
+            <a:pPr marL="0" indent="0" algn="ctr">
               <a:buNone/>
             </a:pPr>
             <a:r>
@@ -2278,7 +2009,7 @@
           <a:bodyPr wrap="square" lIns="0" tIns="0" rIns="0" bIns="0" rtlCol="0" anchor="ctr"/>
           <a:lstStyle/>
           <a:p>
-            <a:pPr algn="ctr" indent="0" marL="0">
+            <a:pPr marL="0" indent="0" algn="ctr">
               <a:buNone/>
             </a:pPr>
             <a:r>
@@ -2342,7 +2073,7 @@
           <a:bodyPr wrap="square" lIns="0" tIns="0" rIns="0" bIns="0" rtlCol="0" anchor="ctr"/>
           <a:lstStyle/>
           <a:p>
-            <a:pPr algn="ctr" indent="0" marL="0">
+            <a:pPr marL="0" indent="0" algn="ctr">
               <a:buNone/>
             </a:pPr>
             <a:r>
@@ -2406,7 +2137,7 @@
           <a:bodyPr wrap="square" lIns="0" tIns="0" rIns="0" bIns="0" rtlCol="0" anchor="ctr"/>
           <a:lstStyle/>
           <a:p>
-            <a:pPr algn="ctr" indent="0" marL="0">
+            <a:pPr marL="0" indent="0" algn="ctr">
               <a:buNone/>
             </a:pPr>
             <a:r>
@@ -2445,11 +2176,11 @@
           <a:bodyPr wrap="square" lIns="0" tIns="0" rIns="0" bIns="0" rtlCol="0" anchor="ctr"/>
           <a:lstStyle/>
           <a:p>
-            <a:pPr indent="0" marL="0">
+            <a:pPr marL="0" indent="0">
               <a:buNone/>
             </a:pPr>
             <a:r>
-              <a:rPr lang="en-US" sz="1200" b="1" spc="100" kern="0" dirty="0">
+              <a:rPr lang="en-US" sz="1200" b="1" kern="0" spc="100" dirty="0">
                 <a:solidFill>
                   <a:srgbClr val="0FA3A3"/>
                 </a:solidFill>
@@ -2484,7 +2215,7 @@
           <a:bodyPr wrap="square" lIns="0" tIns="0" rIns="0" bIns="0" rtlCol="0" anchor="ctr"/>
           <a:lstStyle/>
           <a:p>
-            <a:pPr indent="0" marL="0">
+            <a:pPr marL="0" indent="0">
               <a:lnSpc>
                 <a:spcPct val="105000"/>
               </a:lnSpc>
@@ -2504,7 +2235,7 @@
             <a:endParaRPr lang="en-US" sz="4400" dirty="0"/>
           </a:p>
           <a:p>
-            <a:pPr indent="0" marL="0">
+            <a:pPr marL="0" indent="0">
               <a:lnSpc>
                 <a:spcPct val="105000"/>
               </a:lnSpc>
@@ -2546,7 +2277,7 @@
           <a:bodyPr wrap="square" lIns="0" tIns="0" rIns="0" bIns="0" rtlCol="0" anchor="ctr"/>
           <a:lstStyle/>
           <a:p>
-            <a:pPr indent="0" marL="0">
+            <a:pPr marL="0" indent="0">
               <a:buNone/>
             </a:pPr>
             <a:r>
@@ -2609,7 +2340,7 @@
           <a:bodyPr wrap="square" lIns="0" tIns="0" rIns="0" bIns="0" rtlCol="0" anchor="ctr"/>
           <a:lstStyle/>
           <a:p>
-            <a:pPr indent="0" marL="0">
+            <a:pPr marL="0" indent="0">
               <a:buNone/>
             </a:pPr>
             <a:r>
@@ -2668,7 +2399,7 @@
           <a:bodyPr wrap="square" lIns="0" tIns="0" rIns="0" bIns="0" rtlCol="0" anchor="ctr"/>
           <a:lstStyle/>
           <a:p>
-            <a:pPr indent="0" marL="0">
+            <a:pPr marL="0" indent="0">
               <a:buNone/>
             </a:pPr>
             <a:r>
@@ -2707,7 +2438,7 @@
           <a:bodyPr wrap="square" lIns="0" tIns="0" rIns="0" bIns="0" rtlCol="0" anchor="ctr"/>
           <a:lstStyle/>
           <a:p>
-            <a:pPr indent="0" marL="0">
+            <a:pPr marL="0" indent="0">
               <a:buNone/>
             </a:pPr>
             <a:r>
@@ -2746,7 +2477,7 @@
           <a:bodyPr wrap="square" lIns="0" tIns="0" rIns="0" bIns="0" rtlCol="0" anchor="ctr"/>
           <a:lstStyle/>
           <a:p>
-            <a:pPr indent="0" marL="0">
+            <a:pPr marL="0" indent="0">
               <a:buNone/>
             </a:pPr>
             <a:r>
@@ -2785,7 +2516,7 @@
           <a:bodyPr wrap="square" lIns="0" tIns="0" rIns="0" bIns="0" rtlCol="0" anchor="ctr"/>
           <a:lstStyle/>
           <a:p>
-            <a:pPr indent="0" marL="0">
+            <a:pPr marL="0" indent="0">
               <a:buNone/>
             </a:pPr>
             <a:r>
@@ -2824,7 +2555,7 @@
           <a:bodyPr wrap="square" lIns="0" tIns="0" rIns="0" bIns="0" rtlCol="0" anchor="ctr"/>
           <a:lstStyle/>
           <a:p>
-            <a:pPr indent="0" marL="0">
+            <a:pPr marL="0" indent="0">
               <a:buNone/>
             </a:pPr>
             <a:r>
@@ -2863,7 +2594,7 @@
           <a:bodyPr wrap="square" lIns="0" tIns="0" rIns="0" bIns="0" rtlCol="0" anchor="ctr"/>
           <a:lstStyle/>
           <a:p>
-            <a:pPr indent="0" marL="0">
+            <a:pPr marL="0" indent="0">
               <a:buNone/>
             </a:pPr>
             <a:r>
@@ -2897,6 +2628,7 @@
         <a:solidFill>
           <a:srgbClr val="FBFBFD"/>
         </a:solidFill>
+        <a:effectLst/>
       </p:bgPr>
     </p:bg>
     <p:spTree>
@@ -2934,7 +2666,7 @@
           <a:bodyPr wrap="square" lIns="0" tIns="0" rIns="0" bIns="0" rtlCol="0" anchor="ctr"/>
           <a:lstStyle/>
           <a:p>
-            <a:pPr indent="0" marL="0">
+            <a:pPr marL="0" indent="0">
               <a:buNone/>
             </a:pPr>
             <a:r>
@@ -2973,7 +2705,7 @@
           <a:bodyPr wrap="square" lIns="0" tIns="0" rIns="0" bIns="0" rtlCol="0" anchor="ctr"/>
           <a:lstStyle/>
           <a:p>
-            <a:pPr indent="0" marL="0">
+            <a:pPr marL="0" indent="0">
               <a:buNone/>
             </a:pPr>
             <a:r>
@@ -3007,16 +2739,34 @@
         </p:nvGraphicFramePr>
         <p:xfrm>
           <a:off x="548640" y="1920240"/>
-          <a:ext cx="11064240" cy="914400"/>
+          <a:ext cx="11064240" cy="2651760"/>
         </p:xfrm>
         <a:graphic>
           <a:graphicData uri="http://schemas.openxmlformats.org/drawingml/2006/table">
             <a:tbl>
               <a:tblPr/>
               <a:tblGrid>
-                <a:gridCol w="2377440"/>
-                <a:gridCol w="6217920"/>
-                <a:gridCol w="2468880"/>
+                <a:gridCol w="2377440">
+                  <a:extLst>
+                    <a:ext uri="{9D8B030D-6E8A-4147-A177-3AD203B41FA5}">
+                      <a16:colId xmlns:a16="http://schemas.microsoft.com/office/drawing/2014/main" val="20000"/>
+                    </a:ext>
+                  </a:extLst>
+                </a:gridCol>
+                <a:gridCol w="6217920">
+                  <a:extLst>
+                    <a:ext uri="{9D8B030D-6E8A-4147-A177-3AD203B41FA5}">
+                      <a16:colId xmlns:a16="http://schemas.microsoft.com/office/drawing/2014/main" val="20001"/>
+                    </a:ext>
+                  </a:extLst>
+                </a:gridCol>
+                <a:gridCol w="2468880">
+                  <a:extLst>
+                    <a:ext uri="{9D8B030D-6E8A-4147-A177-3AD203B41FA5}">
+                      <a16:colId xmlns:a16="http://schemas.microsoft.com/office/drawing/2014/main" val="20002"/>
+                    </a:ext>
+                  </a:extLst>
+                </a:gridCol>
               </a:tblGrid>
               <a:tr h="530352">
                 <a:tc>
@@ -3024,7 +2774,7 @@
                     <a:bodyPr/>
                     <a:lstStyle/>
                     <a:p>
-                      <a:pPr algn="l" indent="0" marL="0">
+                      <a:pPr marL="0" indent="0" algn="l">
                         <a:buNone/>
                       </a:pPr>
                       <a:r>
@@ -3092,7 +2842,7 @@
                     <a:bodyPr/>
                     <a:lstStyle/>
                     <a:p>
-                      <a:pPr algn="l" indent="0" marL="0">
+                      <a:pPr marL="0" indent="0" algn="l">
                         <a:buNone/>
                       </a:pPr>
                       <a:r>
@@ -3160,7 +2910,7 @@
                     <a:bodyPr/>
                     <a:lstStyle/>
                     <a:p>
-                      <a:pPr algn="l" indent="0" marL="0">
+                      <a:pPr marL="0" indent="0" algn="l">
                         <a:buNone/>
                       </a:pPr>
                       <a:r>
@@ -3223,6 +2973,11 @@
                     </a:solidFill>
                   </a:tcPr>
                 </a:tc>
+                <a:extLst>
+                  <a:ext uri="{0D108BD9-81ED-4DB2-BD59-A6C34878D82A}">
+                    <a16:rowId xmlns:a16="http://schemas.microsoft.com/office/drawing/2014/main" val="10000"/>
+                  </a:ext>
+                </a:extLst>
               </a:tr>
               <a:tr h="530352">
                 <a:tc>
@@ -3230,7 +2985,7 @@
                     <a:bodyPr/>
                     <a:lstStyle/>
                     <a:p>
-                      <a:pPr algn="l" indent="0" marL="0">
+                      <a:pPr marL="0" indent="0" algn="l">
                         <a:buNone/>
                       </a:pPr>
                       <a:r>
@@ -3298,7 +3053,7 @@
                     <a:bodyPr/>
                     <a:lstStyle/>
                     <a:p>
-                      <a:pPr algn="l" indent="0" marL="0">
+                      <a:pPr marL="0" indent="0" algn="l">
                         <a:buNone/>
                       </a:pPr>
                       <a:r>
@@ -3366,7 +3121,7 @@
                     <a:bodyPr/>
                     <a:lstStyle/>
                     <a:p>
-                      <a:pPr algn="l" indent="0" marL="0">
+                      <a:pPr marL="0" indent="0" algn="l">
                         <a:buNone/>
                       </a:pPr>
                       <a:r>
@@ -3429,6 +3184,11 @@
                     </a:solidFill>
                   </a:tcPr>
                 </a:tc>
+                <a:extLst>
+                  <a:ext uri="{0D108BD9-81ED-4DB2-BD59-A6C34878D82A}">
+                    <a16:rowId xmlns:a16="http://schemas.microsoft.com/office/drawing/2014/main" val="10001"/>
+                  </a:ext>
+                </a:extLst>
               </a:tr>
               <a:tr h="530352">
                 <a:tc>
@@ -3436,7 +3196,7 @@
                     <a:bodyPr/>
                     <a:lstStyle/>
                     <a:p>
-                      <a:pPr algn="l" indent="0" marL="0">
+                      <a:pPr marL="0" indent="0" algn="l">
                         <a:buNone/>
                       </a:pPr>
                       <a:r>
@@ -3504,7 +3264,7 @@
                     <a:bodyPr/>
                     <a:lstStyle/>
                     <a:p>
-                      <a:pPr algn="l" indent="0" marL="0">
+                      <a:pPr marL="0" indent="0" algn="l">
                         <a:buNone/>
                       </a:pPr>
                       <a:r>
@@ -3572,7 +3332,7 @@
                     <a:bodyPr/>
                     <a:lstStyle/>
                     <a:p>
-                      <a:pPr algn="l" indent="0" marL="0">
+                      <a:pPr marL="0" indent="0" algn="l">
                         <a:buNone/>
                       </a:pPr>
                       <a:r>
@@ -3635,6 +3395,11 @@
                     </a:solidFill>
                   </a:tcPr>
                 </a:tc>
+                <a:extLst>
+                  <a:ext uri="{0D108BD9-81ED-4DB2-BD59-A6C34878D82A}">
+                    <a16:rowId xmlns:a16="http://schemas.microsoft.com/office/drawing/2014/main" val="10002"/>
+                  </a:ext>
+                </a:extLst>
               </a:tr>
               <a:tr h="530352">
                 <a:tc>
@@ -3642,7 +3407,7 @@
                     <a:bodyPr/>
                     <a:lstStyle/>
                     <a:p>
-                      <a:pPr algn="l" indent="0" marL="0">
+                      <a:pPr marL="0" indent="0" algn="l">
                         <a:buNone/>
                       </a:pPr>
                       <a:r>
@@ -3710,7 +3475,7 @@
                     <a:bodyPr/>
                     <a:lstStyle/>
                     <a:p>
-                      <a:pPr algn="l" indent="0" marL="0">
+                      <a:pPr marL="0" indent="0" algn="l">
                         <a:buNone/>
                       </a:pPr>
                       <a:r>
@@ -3778,7 +3543,7 @@
                     <a:bodyPr/>
                     <a:lstStyle/>
                     <a:p>
-                      <a:pPr algn="l" indent="0" marL="0">
+                      <a:pPr marL="0" indent="0" algn="l">
                         <a:buNone/>
                       </a:pPr>
                       <a:r>
@@ -3841,6 +3606,11 @@
                     </a:solidFill>
                   </a:tcPr>
                 </a:tc>
+                <a:extLst>
+                  <a:ext uri="{0D108BD9-81ED-4DB2-BD59-A6C34878D82A}">
+                    <a16:rowId xmlns:a16="http://schemas.microsoft.com/office/drawing/2014/main" val="10003"/>
+                  </a:ext>
+                </a:extLst>
               </a:tr>
               <a:tr h="530352">
                 <a:tc>
@@ -3848,7 +3618,7 @@
                     <a:bodyPr/>
                     <a:lstStyle/>
                     <a:p>
-                      <a:pPr algn="l" indent="0" marL="0">
+                      <a:pPr marL="0" indent="0" algn="l">
                         <a:buNone/>
                       </a:pPr>
                       <a:r>
@@ -3916,7 +3686,7 @@
                     <a:bodyPr/>
                     <a:lstStyle/>
                     <a:p>
-                      <a:pPr algn="l" indent="0" marL="0">
+                      <a:pPr marL="0" indent="0" algn="l">
                         <a:buNone/>
                       </a:pPr>
                       <a:r>
@@ -3984,7 +3754,7 @@
                     <a:bodyPr/>
                     <a:lstStyle/>
                     <a:p>
-                      <a:pPr algn="l" indent="0" marL="0">
+                      <a:pPr marL="0" indent="0" algn="l">
                         <a:buNone/>
                       </a:pPr>
                       <a:r>
@@ -4047,6 +3817,11 @@
                     </a:solidFill>
                   </a:tcPr>
                 </a:tc>
+                <a:extLst>
+                  <a:ext uri="{0D108BD9-81ED-4DB2-BD59-A6C34878D82A}">
+                    <a16:rowId xmlns:a16="http://schemas.microsoft.com/office/drawing/2014/main" val="10004"/>
+                  </a:ext>
+                </a:extLst>
               </a:tr>
             </a:tbl>
           </a:graphicData>
@@ -4078,7 +3853,7 @@
             <a:prstDash val="solid"/>
           </a:ln>
           <a:effectLst>
-            <a:outerShdw sx="100000" sy="100000" kx="0" ky="0" algn="bl" rotWithShape="0" blurRad="76200" dist="25400" dir="5400000">
+            <a:outerShdw blurRad="76200" dist="25400" dir="5400000" algn="bl" rotWithShape="0">
               <a:srgbClr val="5B6B87">
                 <a:alpha val="18000"/>
               </a:srgbClr>
@@ -4107,7 +3882,7 @@
           <a:bodyPr wrap="square" lIns="0" tIns="0" rIns="0" bIns="0" rtlCol="0" anchor="ctr"/>
           <a:lstStyle/>
           <a:p>
-            <a:pPr indent="0" marL="0">
+            <a:pPr marL="0" indent="0">
               <a:buNone/>
             </a:pPr>
             <a:r>
@@ -4146,7 +3921,7 @@
           <a:bodyPr wrap="square" lIns="0" tIns="0" rIns="0" bIns="0" rtlCol="0" anchor="ctr"/>
           <a:lstStyle/>
           <a:p>
-            <a:pPr indent="0" marL="0">
+            <a:pPr marL="0" indent="0">
               <a:lnSpc>
                 <a:spcPct val="120000"/>
               </a:lnSpc>
@@ -4188,7 +3963,7 @@
           <a:bodyPr wrap="square" lIns="0" tIns="0" rIns="0" bIns="0" rtlCol="0" anchor="ctr"/>
           <a:lstStyle/>
           <a:p>
-            <a:pPr indent="0" marL="0">
+            <a:pPr marL="0" indent="0">
               <a:buNone/>
             </a:pPr>
             <a:r>
@@ -4227,7 +4002,7 @@
           <a:bodyPr wrap="square" lIns="0" tIns="0" rIns="0" bIns="0" rtlCol="0" anchor="ctr"/>
           <a:lstStyle/>
           <a:p>
-            <a:pPr algn="r" indent="0" marL="0">
+            <a:pPr marL="0" indent="0" algn="r">
               <a:buNone/>
             </a:pPr>
             <a:r>
@@ -4261,6 +4036,7 @@
         <a:solidFill>
           <a:srgbClr val="FBFBFD"/>
         </a:solidFill>
+        <a:effectLst/>
       </p:bgPr>
     </p:bg>
     <p:spTree>
@@ -4298,7 +4074,7 @@
           <a:bodyPr wrap="square" lIns="0" tIns="0" rIns="0" bIns="0" rtlCol="0" anchor="ctr"/>
           <a:lstStyle/>
           <a:p>
-            <a:pPr indent="0" marL="0">
+            <a:pPr marL="0" indent="0">
               <a:buNone/>
             </a:pPr>
             <a:r>
@@ -4337,7 +4113,7 @@
           <a:bodyPr wrap="square" lIns="0" tIns="0" rIns="0" bIns="0" rtlCol="0" anchor="ctr"/>
           <a:lstStyle/>
           <a:p>
-            <a:pPr indent="0" marL="0">
+            <a:pPr marL="0" indent="0">
               <a:buNone/>
             </a:pPr>
             <a:r>
@@ -4381,7 +4157,7 @@
             <a:prstDash val="solid"/>
           </a:ln>
           <a:effectLst>
-            <a:outerShdw sx="100000" sy="100000" kx="0" ky="0" algn="bl" rotWithShape="0" blurRad="76200" dist="25400" dir="5400000">
+            <a:outerShdw blurRad="76200" dist="25400" dir="5400000" algn="bl" rotWithShape="0">
               <a:srgbClr val="5B6B87">
                 <a:alpha val="18000"/>
               </a:srgbClr>
@@ -4432,7 +4208,7 @@
           <a:bodyPr wrap="square" lIns="0" tIns="0" rIns="0" bIns="0" rtlCol="0" anchor="ctr"/>
           <a:lstStyle/>
           <a:p>
-            <a:pPr indent="0" marL="0">
+            <a:pPr marL="0" indent="0">
               <a:buNone/>
             </a:pPr>
             <a:r>
@@ -4471,7 +4247,7 @@
           <a:bodyPr wrap="square" lIns="0" tIns="0" rIns="0" bIns="0" rtlCol="0" anchor="ctr"/>
           <a:lstStyle/>
           <a:p>
-            <a:pPr indent="0" marL="0">
+            <a:pPr marL="0" indent="0">
               <a:lnSpc>
                 <a:spcPct val="118000"/>
               </a:lnSpc>
@@ -4537,7 +4313,7 @@
           <a:bodyPr wrap="square" lIns="0" tIns="0" rIns="0" bIns="0" rtlCol="0" anchor="ctr"/>
           <a:lstStyle/>
           <a:p>
-            <a:pPr indent="0" marL="0">
+            <a:pPr marL="0" indent="0">
               <a:buNone/>
             </a:pPr>
             <a:r>
@@ -4576,7 +4352,7 @@
           <a:bodyPr wrap="square" lIns="0" tIns="0" rIns="0" bIns="0" rtlCol="0" anchor="ctr"/>
           <a:lstStyle/>
           <a:p>
-            <a:pPr indent="0" marL="0">
+            <a:pPr marL="0" indent="0">
               <a:lnSpc>
                 <a:spcPct val="115000"/>
               </a:lnSpc>
@@ -4623,7 +4399,7 @@
             <a:prstDash val="solid"/>
           </a:ln>
           <a:effectLst>
-            <a:outerShdw sx="100000" sy="100000" kx="0" ky="0" algn="bl" rotWithShape="0" blurRad="76200" dist="25400" dir="5400000">
+            <a:outerShdw blurRad="76200" dist="25400" dir="5400000" algn="bl" rotWithShape="0">
               <a:srgbClr val="5B6B87">
                 <a:alpha val="18000"/>
               </a:srgbClr>
@@ -4674,7 +4450,7 @@
           <a:bodyPr wrap="square" lIns="0" tIns="0" rIns="0" bIns="0" rtlCol="0" anchor="ctr"/>
           <a:lstStyle/>
           <a:p>
-            <a:pPr indent="0" marL="0">
+            <a:pPr marL="0" indent="0">
               <a:buNone/>
             </a:pPr>
             <a:r>
@@ -4713,7 +4489,7 @@
           <a:bodyPr wrap="square" lIns="0" tIns="0" rIns="0" bIns="0" rtlCol="0" anchor="ctr"/>
           <a:lstStyle/>
           <a:p>
-            <a:pPr indent="0" marL="0">
+            <a:pPr marL="0" indent="0">
               <a:lnSpc>
                 <a:spcPct val="118000"/>
               </a:lnSpc>
@@ -4779,7 +4555,7 @@
           <a:bodyPr wrap="square" lIns="0" tIns="0" rIns="0" bIns="0" rtlCol="0" anchor="ctr"/>
           <a:lstStyle/>
           <a:p>
-            <a:pPr indent="0" marL="0">
+            <a:pPr marL="0" indent="0">
               <a:buNone/>
             </a:pPr>
             <a:r>
@@ -4818,7 +4594,7 @@
           <a:bodyPr wrap="square" lIns="0" tIns="0" rIns="0" bIns="0" rtlCol="0" anchor="ctr"/>
           <a:lstStyle/>
           <a:p>
-            <a:pPr indent="0" marL="0">
+            <a:pPr marL="0" indent="0">
               <a:lnSpc>
                 <a:spcPct val="115000"/>
               </a:lnSpc>
@@ -4860,7 +4636,7 @@
           <a:bodyPr wrap="square" lIns="0" tIns="0" rIns="0" bIns="0" rtlCol="0" anchor="ctr"/>
           <a:lstStyle/>
           <a:p>
-            <a:pPr indent="0" marL="0">
+            <a:pPr marL="0" indent="0">
               <a:buNone/>
             </a:pPr>
             <a:r>
@@ -4899,7 +4675,7 @@
           <a:bodyPr wrap="square" lIns="0" tIns="0" rIns="0" bIns="0" rtlCol="0" anchor="ctr"/>
           <a:lstStyle/>
           <a:p>
-            <a:pPr algn="r" indent="0" marL="0">
+            <a:pPr marL="0" indent="0" algn="r">
               <a:buNone/>
             </a:pPr>
             <a:r>
@@ -4933,6 +4709,7 @@
         <a:solidFill>
           <a:srgbClr val="FBFBFD"/>
         </a:solidFill>
+        <a:effectLst/>
       </p:bgPr>
     </p:bg>
     <p:spTree>
@@ -4970,7 +4747,7 @@
           <a:bodyPr wrap="square" lIns="0" tIns="0" rIns="0" bIns="0" rtlCol="0" anchor="ctr"/>
           <a:lstStyle/>
           <a:p>
-            <a:pPr indent="0" marL="0">
+            <a:pPr marL="0" indent="0">
               <a:buNone/>
             </a:pPr>
             <a:r>
@@ -5009,7 +4786,7 @@
           <a:bodyPr wrap="square" lIns="0" tIns="0" rIns="0" bIns="0" rtlCol="0" anchor="ctr"/>
           <a:lstStyle/>
           <a:p>
-            <a:pPr indent="0" marL="0">
+            <a:pPr marL="0" indent="0">
               <a:buNone/>
             </a:pPr>
             <a:r>
@@ -5043,16 +4820,34 @@
         </p:nvGraphicFramePr>
         <p:xfrm>
           <a:off x="548640" y="1920240"/>
-          <a:ext cx="11064240" cy="914400"/>
+          <a:ext cx="11064240" cy="3712464"/>
         </p:xfrm>
         <a:graphic>
           <a:graphicData uri="http://schemas.openxmlformats.org/drawingml/2006/table">
             <a:tbl>
               <a:tblPr/>
               <a:tblGrid>
-                <a:gridCol w="2743200"/>
-                <a:gridCol w="5577840"/>
-                <a:gridCol w="2743200"/>
+                <a:gridCol w="2743200">
+                  <a:extLst>
+                    <a:ext uri="{9D8B030D-6E8A-4147-A177-3AD203B41FA5}">
+                      <a16:colId xmlns:a16="http://schemas.microsoft.com/office/drawing/2014/main" val="20000"/>
+                    </a:ext>
+                  </a:extLst>
+                </a:gridCol>
+                <a:gridCol w="5577840">
+                  <a:extLst>
+                    <a:ext uri="{9D8B030D-6E8A-4147-A177-3AD203B41FA5}">
+                      <a16:colId xmlns:a16="http://schemas.microsoft.com/office/drawing/2014/main" val="20001"/>
+                    </a:ext>
+                  </a:extLst>
+                </a:gridCol>
+                <a:gridCol w="2743200">
+                  <a:extLst>
+                    <a:ext uri="{9D8B030D-6E8A-4147-A177-3AD203B41FA5}">
+                      <a16:colId xmlns:a16="http://schemas.microsoft.com/office/drawing/2014/main" val="20002"/>
+                    </a:ext>
+                  </a:extLst>
+                </a:gridCol>
               </a:tblGrid>
               <a:tr h="530352">
                 <a:tc>
@@ -5060,7 +4855,7 @@
                     <a:bodyPr/>
                     <a:lstStyle/>
                     <a:p>
-                      <a:pPr algn="l" indent="0" marL="0">
+                      <a:pPr marL="0" indent="0" algn="l">
                         <a:buNone/>
                       </a:pPr>
                       <a:r>
@@ -5128,7 +4923,7 @@
                     <a:bodyPr/>
                     <a:lstStyle/>
                     <a:p>
-                      <a:pPr algn="l" indent="0" marL="0">
+                      <a:pPr marL="0" indent="0" algn="l">
                         <a:buNone/>
                       </a:pPr>
                       <a:r>
@@ -5196,7 +4991,7 @@
                     <a:bodyPr/>
                     <a:lstStyle/>
                     <a:p>
-                      <a:pPr algn="l" indent="0" marL="0">
+                      <a:pPr marL="0" indent="0" algn="l">
                         <a:buNone/>
                       </a:pPr>
                       <a:r>
@@ -5259,6 +5054,11 @@
                     </a:solidFill>
                   </a:tcPr>
                 </a:tc>
+                <a:extLst>
+                  <a:ext uri="{0D108BD9-81ED-4DB2-BD59-A6C34878D82A}">
+                    <a16:rowId xmlns:a16="http://schemas.microsoft.com/office/drawing/2014/main" val="10000"/>
+                  </a:ext>
+                </a:extLst>
               </a:tr>
               <a:tr h="530352">
                 <a:tc>
@@ -5266,7 +5066,7 @@
                     <a:bodyPr/>
                     <a:lstStyle/>
                     <a:p>
-                      <a:pPr algn="l" indent="0" marL="0">
+                      <a:pPr marL="0" indent="0" algn="l">
                         <a:buNone/>
                       </a:pPr>
                       <a:r>
@@ -5334,7 +5134,7 @@
                     <a:bodyPr/>
                     <a:lstStyle/>
                     <a:p>
-                      <a:pPr algn="l" indent="0" marL="0">
+                      <a:pPr marL="0" indent="0" algn="l">
                         <a:buNone/>
                       </a:pPr>
                       <a:r>
@@ -5402,7 +5202,7 @@
                     <a:bodyPr/>
                     <a:lstStyle/>
                     <a:p>
-                      <a:pPr algn="l" indent="0" marL="0">
+                      <a:pPr marL="0" indent="0" algn="l">
                         <a:buNone/>
                       </a:pPr>
                       <a:r>
@@ -5465,6 +5265,11 @@
                     </a:solidFill>
                   </a:tcPr>
                 </a:tc>
+                <a:extLst>
+                  <a:ext uri="{0D108BD9-81ED-4DB2-BD59-A6C34878D82A}">
+                    <a16:rowId xmlns:a16="http://schemas.microsoft.com/office/drawing/2014/main" val="10001"/>
+                  </a:ext>
+                </a:extLst>
               </a:tr>
               <a:tr h="530352">
                 <a:tc>
@@ -5472,7 +5277,7 @@
                     <a:bodyPr/>
                     <a:lstStyle/>
                     <a:p>
-                      <a:pPr algn="l" indent="0" marL="0">
+                      <a:pPr marL="0" indent="0" algn="l">
                         <a:buNone/>
                       </a:pPr>
                       <a:r>
@@ -5540,7 +5345,7 @@
                     <a:bodyPr/>
                     <a:lstStyle/>
                     <a:p>
-                      <a:pPr algn="l" indent="0" marL="0">
+                      <a:pPr marL="0" indent="0" algn="l">
                         <a:buNone/>
                       </a:pPr>
                       <a:r>
@@ -5608,7 +5413,7 @@
                     <a:bodyPr/>
                     <a:lstStyle/>
                     <a:p>
-                      <a:pPr algn="l" indent="0" marL="0">
+                      <a:pPr marL="0" indent="0" algn="l">
                         <a:buNone/>
                       </a:pPr>
                       <a:r>
@@ -5671,6 +5476,11 @@
                     </a:solidFill>
                   </a:tcPr>
                 </a:tc>
+                <a:extLst>
+                  <a:ext uri="{0D108BD9-81ED-4DB2-BD59-A6C34878D82A}">
+                    <a16:rowId xmlns:a16="http://schemas.microsoft.com/office/drawing/2014/main" val="10002"/>
+                  </a:ext>
+                </a:extLst>
               </a:tr>
               <a:tr h="530352">
                 <a:tc>
@@ -5678,7 +5488,7 @@
                     <a:bodyPr/>
                     <a:lstStyle/>
                     <a:p>
-                      <a:pPr algn="l" indent="0" marL="0">
+                      <a:pPr marL="0" indent="0" algn="l">
                         <a:buNone/>
                       </a:pPr>
                       <a:r>
@@ -5746,7 +5556,7 @@
                     <a:bodyPr/>
                     <a:lstStyle/>
                     <a:p>
-                      <a:pPr algn="l" indent="0" marL="0">
+                      <a:pPr marL="0" indent="0" algn="l">
                         <a:buNone/>
                       </a:pPr>
                       <a:r>
@@ -5814,7 +5624,7 @@
                     <a:bodyPr/>
                     <a:lstStyle/>
                     <a:p>
-                      <a:pPr algn="l" indent="0" marL="0">
+                      <a:pPr marL="0" indent="0" algn="l">
                         <a:buNone/>
                       </a:pPr>
                       <a:r>
@@ -5877,6 +5687,11 @@
                     </a:solidFill>
                   </a:tcPr>
                 </a:tc>
+                <a:extLst>
+                  <a:ext uri="{0D108BD9-81ED-4DB2-BD59-A6C34878D82A}">
+                    <a16:rowId xmlns:a16="http://schemas.microsoft.com/office/drawing/2014/main" val="10003"/>
+                  </a:ext>
+                </a:extLst>
               </a:tr>
               <a:tr h="530352">
                 <a:tc>
@@ -5884,7 +5699,7 @@
                     <a:bodyPr/>
                     <a:lstStyle/>
                     <a:p>
-                      <a:pPr algn="l" indent="0" marL="0">
+                      <a:pPr marL="0" indent="0" algn="l">
                         <a:buNone/>
                       </a:pPr>
                       <a:r>
@@ -5952,7 +5767,7 @@
                     <a:bodyPr/>
                     <a:lstStyle/>
                     <a:p>
-                      <a:pPr algn="l" indent="0" marL="0">
+                      <a:pPr marL="0" indent="0" algn="l">
                         <a:buNone/>
                       </a:pPr>
                       <a:r>
@@ -6020,7 +5835,7 @@
                     <a:bodyPr/>
                     <a:lstStyle/>
                     <a:p>
-                      <a:pPr algn="l" indent="0" marL="0">
+                      <a:pPr marL="0" indent="0" algn="l">
                         <a:buNone/>
                       </a:pPr>
                       <a:r>
@@ -6083,6 +5898,11 @@
                     </a:solidFill>
                   </a:tcPr>
                 </a:tc>
+                <a:extLst>
+                  <a:ext uri="{0D108BD9-81ED-4DB2-BD59-A6C34878D82A}">
+                    <a16:rowId xmlns:a16="http://schemas.microsoft.com/office/drawing/2014/main" val="10004"/>
+                  </a:ext>
+                </a:extLst>
               </a:tr>
               <a:tr h="530352">
                 <a:tc>
@@ -6090,7 +5910,7 @@
                     <a:bodyPr/>
                     <a:lstStyle/>
                     <a:p>
-                      <a:pPr algn="l" indent="0" marL="0">
+                      <a:pPr marL="0" indent="0" algn="l">
                         <a:buNone/>
                       </a:pPr>
                       <a:r>
@@ -6158,7 +5978,7 @@
                     <a:bodyPr/>
                     <a:lstStyle/>
                     <a:p>
-                      <a:pPr algn="l" indent="0" marL="0">
+                      <a:pPr marL="0" indent="0" algn="l">
                         <a:buNone/>
                       </a:pPr>
                       <a:r>
@@ -6226,7 +6046,7 @@
                     <a:bodyPr/>
                     <a:lstStyle/>
                     <a:p>
-                      <a:pPr algn="l" indent="0" marL="0">
+                      <a:pPr marL="0" indent="0" algn="l">
                         <a:buNone/>
                       </a:pPr>
                       <a:r>
@@ -6289,6 +6109,11 @@
                     </a:solidFill>
                   </a:tcPr>
                 </a:tc>
+                <a:extLst>
+                  <a:ext uri="{0D108BD9-81ED-4DB2-BD59-A6C34878D82A}">
+                    <a16:rowId xmlns:a16="http://schemas.microsoft.com/office/drawing/2014/main" val="10005"/>
+                  </a:ext>
+                </a:extLst>
               </a:tr>
               <a:tr h="530352">
                 <a:tc>
@@ -6296,7 +6121,7 @@
                     <a:bodyPr/>
                     <a:lstStyle/>
                     <a:p>
-                      <a:pPr algn="l" indent="0" marL="0">
+                      <a:pPr marL="0" indent="0" algn="l">
                         <a:buNone/>
                       </a:pPr>
                       <a:r>
@@ -6364,7 +6189,7 @@
                     <a:bodyPr/>
                     <a:lstStyle/>
                     <a:p>
-                      <a:pPr algn="l" indent="0" marL="0">
+                      <a:pPr marL="0" indent="0" algn="l">
                         <a:buNone/>
                       </a:pPr>
                       <a:r>
@@ -6432,7 +6257,7 @@
                     <a:bodyPr/>
                     <a:lstStyle/>
                     <a:p>
-                      <a:pPr algn="l" indent="0" marL="0">
+                      <a:pPr marL="0" indent="0" algn="l">
                         <a:buNone/>
                       </a:pPr>
                       <a:r>
@@ -6495,6 +6320,11 @@
                     </a:solidFill>
                   </a:tcPr>
                 </a:tc>
+                <a:extLst>
+                  <a:ext uri="{0D108BD9-81ED-4DB2-BD59-A6C34878D82A}">
+                    <a16:rowId xmlns:a16="http://schemas.microsoft.com/office/drawing/2014/main" val="10006"/>
+                  </a:ext>
+                </a:extLst>
               </a:tr>
             </a:tbl>
           </a:graphicData>
@@ -6521,7 +6351,7 @@
           <a:bodyPr wrap="square" lIns="0" tIns="0" rIns="0" bIns="0" rtlCol="0" anchor="ctr"/>
           <a:lstStyle/>
           <a:p>
-            <a:pPr indent="0" marL="0">
+            <a:pPr marL="0" indent="0">
               <a:buNone/>
             </a:pPr>
             <a:r>
@@ -6560,7 +6390,7 @@
           <a:bodyPr wrap="square" lIns="0" tIns="0" rIns="0" bIns="0" rtlCol="0" anchor="ctr"/>
           <a:lstStyle/>
           <a:p>
-            <a:pPr algn="r" indent="0" marL="0">
+            <a:pPr marL="0" indent="0" algn="r">
               <a:buNone/>
             </a:pPr>
             <a:r>
@@ -6594,6 +6424,7 @@
         <a:solidFill>
           <a:srgbClr val="FBFBFD"/>
         </a:solidFill>
+        <a:effectLst/>
       </p:bgPr>
     </p:bg>
     <p:spTree>
@@ -6631,7 +6462,7 @@
           <a:bodyPr wrap="square" lIns="0" tIns="0" rIns="0" bIns="0" rtlCol="0" anchor="ctr"/>
           <a:lstStyle/>
           <a:p>
-            <a:pPr indent="0" marL="0">
+            <a:pPr marL="0" indent="0">
               <a:buNone/>
             </a:pPr>
             <a:r>
@@ -6670,7 +6501,7 @@
           <a:bodyPr wrap="square" lIns="0" tIns="0" rIns="0" bIns="0" rtlCol="0" anchor="ctr"/>
           <a:lstStyle/>
           <a:p>
-            <a:pPr indent="0" marL="0">
+            <a:pPr marL="0" indent="0">
               <a:buNone/>
             </a:pPr>
             <a:r>
@@ -6704,15 +6535,27 @@
         </p:nvGraphicFramePr>
         <p:xfrm>
           <a:off x="548640" y="1828800"/>
-          <a:ext cx="5394960" cy="914400"/>
+          <a:ext cx="5394960" cy="2743200"/>
         </p:xfrm>
         <a:graphic>
           <a:graphicData uri="http://schemas.openxmlformats.org/drawingml/2006/table">
             <a:tbl>
               <a:tblPr/>
               <a:tblGrid>
-                <a:gridCol w="1600200"/>
-                <a:gridCol w="3794760"/>
+                <a:gridCol w="1600200">
+                  <a:extLst>
+                    <a:ext uri="{9D8B030D-6E8A-4147-A177-3AD203B41FA5}">
+                      <a16:colId xmlns:a16="http://schemas.microsoft.com/office/drawing/2014/main" val="20000"/>
+                    </a:ext>
+                  </a:extLst>
+                </a:gridCol>
+                <a:gridCol w="3794760">
+                  <a:extLst>
+                    <a:ext uri="{9D8B030D-6E8A-4147-A177-3AD203B41FA5}">
+                      <a16:colId xmlns:a16="http://schemas.microsoft.com/office/drawing/2014/main" val="20001"/>
+                    </a:ext>
+                  </a:extLst>
+                </a:gridCol>
               </a:tblGrid>
               <a:tr h="457200">
                 <a:tc>
@@ -6720,7 +6563,7 @@
                     <a:bodyPr/>
                     <a:lstStyle/>
                     <a:p>
-                      <a:pPr algn="l" indent="0" marL="0">
+                      <a:pPr marL="0" indent="0" algn="l">
                         <a:buNone/>
                       </a:pPr>
                       <a:r>
@@ -6788,7 +6631,7 @@
                     <a:bodyPr/>
                     <a:lstStyle/>
                     <a:p>
-                      <a:pPr algn="l" indent="0" marL="0">
+                      <a:pPr marL="0" indent="0" algn="l">
                         <a:buNone/>
                       </a:pPr>
                       <a:r>
@@ -6851,6 +6694,11 @@
                     </a:solidFill>
                   </a:tcPr>
                 </a:tc>
+                <a:extLst>
+                  <a:ext uri="{0D108BD9-81ED-4DB2-BD59-A6C34878D82A}">
+                    <a16:rowId xmlns:a16="http://schemas.microsoft.com/office/drawing/2014/main" val="10000"/>
+                  </a:ext>
+                </a:extLst>
               </a:tr>
               <a:tr h="457200">
                 <a:tc>
@@ -6858,7 +6706,7 @@
                     <a:bodyPr/>
                     <a:lstStyle/>
                     <a:p>
-                      <a:pPr algn="l" indent="0" marL="0">
+                      <a:pPr marL="0" indent="0" algn="l">
                         <a:buNone/>
                       </a:pPr>
                       <a:r>
@@ -6926,7 +6774,7 @@
                     <a:bodyPr/>
                     <a:lstStyle/>
                     <a:p>
-                      <a:pPr algn="l" indent="0" marL="0">
+                      <a:pPr marL="0" indent="0" algn="l">
                         <a:buNone/>
                       </a:pPr>
                       <a:r>
@@ -6989,6 +6837,11 @@
                     </a:solidFill>
                   </a:tcPr>
                 </a:tc>
+                <a:extLst>
+                  <a:ext uri="{0D108BD9-81ED-4DB2-BD59-A6C34878D82A}">
+                    <a16:rowId xmlns:a16="http://schemas.microsoft.com/office/drawing/2014/main" val="10001"/>
+                  </a:ext>
+                </a:extLst>
               </a:tr>
               <a:tr h="457200">
                 <a:tc>
@@ -6996,7 +6849,7 @@
                     <a:bodyPr/>
                     <a:lstStyle/>
                     <a:p>
-                      <a:pPr algn="l" indent="0" marL="0">
+                      <a:pPr marL="0" indent="0" algn="l">
                         <a:buNone/>
                       </a:pPr>
                       <a:r>
@@ -7064,7 +6917,7 @@
                     <a:bodyPr/>
                     <a:lstStyle/>
                     <a:p>
-                      <a:pPr algn="l" indent="0" marL="0">
+                      <a:pPr marL="0" indent="0" algn="l">
                         <a:buNone/>
                       </a:pPr>
                       <a:r>
@@ -7127,6 +6980,11 @@
                     </a:solidFill>
                   </a:tcPr>
                 </a:tc>
+                <a:extLst>
+                  <a:ext uri="{0D108BD9-81ED-4DB2-BD59-A6C34878D82A}">
+                    <a16:rowId xmlns:a16="http://schemas.microsoft.com/office/drawing/2014/main" val="10002"/>
+                  </a:ext>
+                </a:extLst>
               </a:tr>
               <a:tr h="457200">
                 <a:tc>
@@ -7134,7 +6992,7 @@
                     <a:bodyPr/>
                     <a:lstStyle/>
                     <a:p>
-                      <a:pPr algn="l" indent="0" marL="0">
+                      <a:pPr marL="0" indent="0" algn="l">
                         <a:buNone/>
                       </a:pPr>
                       <a:r>
@@ -7202,7 +7060,7 @@
                     <a:bodyPr/>
                     <a:lstStyle/>
                     <a:p>
-                      <a:pPr algn="l" indent="0" marL="0">
+                      <a:pPr marL="0" indent="0" algn="l">
                         <a:buNone/>
                       </a:pPr>
                       <a:r>
@@ -7265,6 +7123,11 @@
                     </a:solidFill>
                   </a:tcPr>
                 </a:tc>
+                <a:extLst>
+                  <a:ext uri="{0D108BD9-81ED-4DB2-BD59-A6C34878D82A}">
+                    <a16:rowId xmlns:a16="http://schemas.microsoft.com/office/drawing/2014/main" val="10003"/>
+                  </a:ext>
+                </a:extLst>
               </a:tr>
               <a:tr h="457200">
                 <a:tc>
@@ -7272,7 +7135,7 @@
                     <a:bodyPr/>
                     <a:lstStyle/>
                     <a:p>
-                      <a:pPr algn="l" indent="0" marL="0">
+                      <a:pPr marL="0" indent="0" algn="l">
                         <a:buNone/>
                       </a:pPr>
                       <a:r>
@@ -7340,7 +7203,7 @@
                     <a:bodyPr/>
                     <a:lstStyle/>
                     <a:p>
-                      <a:pPr algn="l" indent="0" marL="0">
+                      <a:pPr marL="0" indent="0" algn="l">
                         <a:buNone/>
                       </a:pPr>
                       <a:r>
@@ -7403,6 +7266,11 @@
                     </a:solidFill>
                   </a:tcPr>
                 </a:tc>
+                <a:extLst>
+                  <a:ext uri="{0D108BD9-81ED-4DB2-BD59-A6C34878D82A}">
+                    <a16:rowId xmlns:a16="http://schemas.microsoft.com/office/drawing/2014/main" val="10004"/>
+                  </a:ext>
+                </a:extLst>
               </a:tr>
               <a:tr h="457200">
                 <a:tc>
@@ -7410,7 +7278,7 @@
                     <a:bodyPr/>
                     <a:lstStyle/>
                     <a:p>
-                      <a:pPr algn="l" indent="0" marL="0">
+                      <a:pPr marL="0" indent="0" algn="l">
                         <a:buNone/>
                       </a:pPr>
                       <a:r>
@@ -7478,7 +7346,7 @@
                     <a:bodyPr/>
                     <a:lstStyle/>
                     <a:p>
-                      <a:pPr algn="l" indent="0" marL="0">
+                      <a:pPr marL="0" indent="0" algn="l">
                         <a:buNone/>
                       </a:pPr>
                       <a:r>
@@ -7541,6 +7409,11 @@
                     </a:solidFill>
                   </a:tcPr>
                 </a:tc>
+                <a:extLst>
+                  <a:ext uri="{0D108BD9-81ED-4DB2-BD59-A6C34878D82A}">
+                    <a16:rowId xmlns:a16="http://schemas.microsoft.com/office/drawing/2014/main" val="10005"/>
+                  </a:ext>
+                </a:extLst>
               </a:tr>
             </a:tbl>
           </a:graphicData>
@@ -7567,7 +7440,7 @@
           <a:bodyPr wrap="square" lIns="0" tIns="0" rIns="0" bIns="0" rtlCol="0" anchor="ctr"/>
           <a:lstStyle/>
           <a:p>
-            <a:pPr indent="0" marL="0">
+            <a:pPr marL="0" indent="0">
               <a:buNone/>
             </a:pPr>
             <a:r>
@@ -7601,16 +7474,34 @@
         </p:nvGraphicFramePr>
         <p:xfrm>
           <a:off x="6263640" y="1828800"/>
-          <a:ext cx="5349240" cy="914400"/>
+          <a:ext cx="5349240" cy="1828800"/>
         </p:xfrm>
         <a:graphic>
           <a:graphicData uri="http://schemas.openxmlformats.org/drawingml/2006/table">
             <a:tbl>
               <a:tblPr/>
               <a:tblGrid>
-                <a:gridCol w="2331720"/>
-                <a:gridCol w="1965960"/>
-                <a:gridCol w="1051560"/>
+                <a:gridCol w="2331720">
+                  <a:extLst>
+                    <a:ext uri="{9D8B030D-6E8A-4147-A177-3AD203B41FA5}">
+                      <a16:colId xmlns:a16="http://schemas.microsoft.com/office/drawing/2014/main" val="20000"/>
+                    </a:ext>
+                  </a:extLst>
+                </a:gridCol>
+                <a:gridCol w="1965960">
+                  <a:extLst>
+                    <a:ext uri="{9D8B030D-6E8A-4147-A177-3AD203B41FA5}">
+                      <a16:colId xmlns:a16="http://schemas.microsoft.com/office/drawing/2014/main" val="20001"/>
+                    </a:ext>
+                  </a:extLst>
+                </a:gridCol>
+                <a:gridCol w="1051560">
+                  <a:extLst>
+                    <a:ext uri="{9D8B030D-6E8A-4147-A177-3AD203B41FA5}">
+                      <a16:colId xmlns:a16="http://schemas.microsoft.com/office/drawing/2014/main" val="20002"/>
+                    </a:ext>
+                  </a:extLst>
+                </a:gridCol>
               </a:tblGrid>
               <a:tr h="457200">
                 <a:tc>
@@ -7618,7 +7509,7 @@
                     <a:bodyPr/>
                     <a:lstStyle/>
                     <a:p>
-                      <a:pPr algn="l" indent="0" marL="0">
+                      <a:pPr marL="0" indent="0" algn="l">
                         <a:buNone/>
                       </a:pPr>
                       <a:r>
@@ -7686,7 +7577,7 @@
                     <a:bodyPr/>
                     <a:lstStyle/>
                     <a:p>
-                      <a:pPr algn="l" indent="0" marL="0">
+                      <a:pPr marL="0" indent="0" algn="l">
                         <a:buNone/>
                       </a:pPr>
                       <a:r>
@@ -7754,7 +7645,7 @@
                     <a:bodyPr/>
                     <a:lstStyle/>
                     <a:p>
-                      <a:pPr algn="l" indent="0" marL="0">
+                      <a:pPr marL="0" indent="0" algn="l">
                         <a:buNone/>
                       </a:pPr>
                       <a:r>
@@ -7817,6 +7708,11 @@
                     </a:solidFill>
                   </a:tcPr>
                 </a:tc>
+                <a:extLst>
+                  <a:ext uri="{0D108BD9-81ED-4DB2-BD59-A6C34878D82A}">
+                    <a16:rowId xmlns:a16="http://schemas.microsoft.com/office/drawing/2014/main" val="10000"/>
+                  </a:ext>
+                </a:extLst>
               </a:tr>
               <a:tr h="457200">
                 <a:tc>
@@ -7824,7 +7720,7 @@
                     <a:bodyPr/>
                     <a:lstStyle/>
                     <a:p>
-                      <a:pPr algn="l" indent="0" marL="0">
+                      <a:pPr marL="0" indent="0" algn="l">
                         <a:buNone/>
                       </a:pPr>
                       <a:r>
@@ -7892,7 +7788,7 @@
                     <a:bodyPr/>
                     <a:lstStyle/>
                     <a:p>
-                      <a:pPr algn="l" indent="0" marL="0">
+                      <a:pPr marL="0" indent="0" algn="l">
                         <a:buNone/>
                       </a:pPr>
                       <a:r>
@@ -7960,7 +7856,7 @@
                     <a:bodyPr/>
                     <a:lstStyle/>
                     <a:p>
-                      <a:pPr algn="l" indent="0" marL="0">
+                      <a:pPr marL="0" indent="0" algn="l">
                         <a:buNone/>
                       </a:pPr>
                       <a:r>
@@ -8023,6 +7919,11 @@
                     </a:solidFill>
                   </a:tcPr>
                 </a:tc>
+                <a:extLst>
+                  <a:ext uri="{0D108BD9-81ED-4DB2-BD59-A6C34878D82A}">
+                    <a16:rowId xmlns:a16="http://schemas.microsoft.com/office/drawing/2014/main" val="10001"/>
+                  </a:ext>
+                </a:extLst>
               </a:tr>
               <a:tr h="457200">
                 <a:tc>
@@ -8030,7 +7931,7 @@
                     <a:bodyPr/>
                     <a:lstStyle/>
                     <a:p>
-                      <a:pPr algn="l" indent="0" marL="0">
+                      <a:pPr marL="0" indent="0" algn="l">
                         <a:buNone/>
                       </a:pPr>
                       <a:r>
@@ -8098,7 +7999,7 @@
                     <a:bodyPr/>
                     <a:lstStyle/>
                     <a:p>
-                      <a:pPr algn="l" indent="0" marL="0">
+                      <a:pPr marL="0" indent="0" algn="l">
                         <a:buNone/>
                       </a:pPr>
                       <a:r>
@@ -8166,7 +8067,7 @@
                     <a:bodyPr/>
                     <a:lstStyle/>
                     <a:p>
-                      <a:pPr algn="l" indent="0" marL="0">
+                      <a:pPr marL="0" indent="0" algn="l">
                         <a:buNone/>
                       </a:pPr>
                       <a:r>
@@ -8229,6 +8130,11 @@
                     </a:solidFill>
                   </a:tcPr>
                 </a:tc>
+                <a:extLst>
+                  <a:ext uri="{0D108BD9-81ED-4DB2-BD59-A6C34878D82A}">
+                    <a16:rowId xmlns:a16="http://schemas.microsoft.com/office/drawing/2014/main" val="10002"/>
+                  </a:ext>
+                </a:extLst>
               </a:tr>
               <a:tr h="457200">
                 <a:tc>
@@ -8236,7 +8142,7 @@
                     <a:bodyPr/>
                     <a:lstStyle/>
                     <a:p>
-                      <a:pPr algn="l" indent="0" marL="0">
+                      <a:pPr marL="0" indent="0" algn="l">
                         <a:buNone/>
                       </a:pPr>
                       <a:r>
@@ -8304,7 +8210,7 @@
                     <a:bodyPr/>
                     <a:lstStyle/>
                     <a:p>
-                      <a:pPr algn="l" indent="0" marL="0">
+                      <a:pPr marL="0" indent="0" algn="l">
                         <a:buNone/>
                       </a:pPr>
                       <a:r>
@@ -8372,7 +8278,7 @@
                     <a:bodyPr/>
                     <a:lstStyle/>
                     <a:p>
-                      <a:pPr algn="l" indent="0" marL="0">
+                      <a:pPr marL="0" indent="0" algn="l">
                         <a:buNone/>
                       </a:pPr>
                       <a:r>
@@ -8435,6 +8341,11 @@
                     </a:solidFill>
                   </a:tcPr>
                 </a:tc>
+                <a:extLst>
+                  <a:ext uri="{0D108BD9-81ED-4DB2-BD59-A6C34878D82A}">
+                    <a16:rowId xmlns:a16="http://schemas.microsoft.com/office/drawing/2014/main" val="10003"/>
+                  </a:ext>
+                </a:extLst>
               </a:tr>
             </a:tbl>
           </a:graphicData>
@@ -8466,7 +8377,7 @@
             <a:prstDash val="solid"/>
           </a:ln>
           <a:effectLst>
-            <a:outerShdw sx="100000" sy="100000" kx="0" ky="0" algn="bl" rotWithShape="0" blurRad="76200" dist="25400" dir="5400000">
+            <a:outerShdw blurRad="76200" dist="25400" dir="5400000" algn="bl" rotWithShape="0">
               <a:srgbClr val="5B6B87">
                 <a:alpha val="18000"/>
               </a:srgbClr>
@@ -8495,7 +8406,7 @@
           <a:bodyPr wrap="square" lIns="0" tIns="0" rIns="0" bIns="0" rtlCol="0" anchor="ctr"/>
           <a:lstStyle/>
           <a:p>
-            <a:pPr indent="0" marL="0">
+            <a:pPr marL="0" indent="0">
               <a:buNone/>
             </a:pPr>
             <a:r>
@@ -8534,7 +8445,7 @@
           <a:bodyPr wrap="square" lIns="0" tIns="0" rIns="0" bIns="0" rtlCol="0" anchor="ctr"/>
           <a:lstStyle/>
           <a:p>
-            <a:pPr indent="0" marL="0">
+            <a:pPr marL="0" indent="0">
               <a:buNone/>
             </a:pPr>
             <a:r>
@@ -8573,7 +8484,7 @@
           <a:bodyPr wrap="square" lIns="0" tIns="0" rIns="0" bIns="0" rtlCol="0" anchor="ctr"/>
           <a:lstStyle/>
           <a:p>
-            <a:pPr algn="r" indent="0" marL="0">
+            <a:pPr marL="0" indent="0" algn="r">
               <a:buNone/>
             </a:pPr>
             <a:r>
@@ -8607,6 +8518,7 @@
         <a:solidFill>
           <a:srgbClr val="0B1330"/>
         </a:solidFill>
+        <a:effectLst/>
       </p:bgPr>
     </p:bg>
     <p:spTree>
@@ -8733,7 +8645,7 @@
           <a:bodyPr wrap="square" lIns="0" tIns="0" rIns="0" bIns="0" rtlCol="0" anchor="ctr"/>
           <a:lstStyle/>
           <a:p>
-            <a:pPr algn="ctr" indent="0" marL="0">
+            <a:pPr marL="0" indent="0" algn="ctr">
               <a:buNone/>
             </a:pPr>
             <a:r>
@@ -8772,7 +8684,7 @@
           <a:bodyPr wrap="square" lIns="0" tIns="0" rIns="0" bIns="0" rtlCol="0" anchor="ctr"/>
           <a:lstStyle/>
           <a:p>
-            <a:pPr algn="ctr" indent="0" marL="0">
+            <a:pPr marL="0" indent="0" algn="ctr">
               <a:buNone/>
             </a:pPr>
             <a:r>
@@ -8860,7 +8772,7 @@
           <a:bodyPr wrap="square" lIns="0" tIns="0" rIns="0" bIns="0" rtlCol="0" anchor="ctr"/>
           <a:lstStyle/>
           <a:p>
-            <a:pPr algn="ctr" indent="0" marL="0">
+            <a:pPr marL="0" indent="0" algn="ctr">
               <a:buNone/>
             </a:pPr>
             <a:r>
@@ -8899,7 +8811,7 @@
           <a:bodyPr wrap="square" lIns="0" tIns="0" rIns="0" bIns="0" rtlCol="0" anchor="ctr"/>
           <a:lstStyle/>
           <a:p>
-            <a:pPr algn="ctr" indent="0" marL="0">
+            <a:pPr marL="0" indent="0" algn="ctr">
               <a:buNone/>
             </a:pPr>
             <a:r>
@@ -8987,7 +8899,7 @@
           <a:bodyPr wrap="square" lIns="0" tIns="0" rIns="0" bIns="0" rtlCol="0" anchor="ctr"/>
           <a:lstStyle/>
           <a:p>
-            <a:pPr algn="ctr" indent="0" marL="0">
+            <a:pPr marL="0" indent="0" algn="ctr">
               <a:buNone/>
             </a:pPr>
             <a:r>
@@ -9026,7 +8938,7 @@
           <a:bodyPr wrap="square" lIns="0" tIns="0" rIns="0" bIns="0" rtlCol="0" anchor="ctr"/>
           <a:lstStyle/>
           <a:p>
-            <a:pPr algn="ctr" indent="0" marL="0">
+            <a:pPr marL="0" indent="0" algn="ctr">
               <a:buNone/>
             </a:pPr>
             <a:r>
@@ -9114,7 +9026,7 @@
           <a:bodyPr wrap="square" lIns="0" tIns="0" rIns="0" bIns="0" rtlCol="0" anchor="ctr"/>
           <a:lstStyle/>
           <a:p>
-            <a:pPr algn="ctr" indent="0" marL="0">
+            <a:pPr marL="0" indent="0" algn="ctr">
               <a:buNone/>
             </a:pPr>
             <a:r>
@@ -9153,7 +9065,7 @@
           <a:bodyPr wrap="square" lIns="0" tIns="0" rIns="0" bIns="0" rtlCol="0" anchor="ctr"/>
           <a:lstStyle/>
           <a:p>
-            <a:pPr algn="ctr" indent="0" marL="0">
+            <a:pPr marL="0" indent="0" algn="ctr">
               <a:buNone/>
             </a:pPr>
             <a:r>
@@ -9241,7 +9153,7 @@
           <a:bodyPr wrap="square" lIns="0" tIns="0" rIns="0" bIns="0" rtlCol="0" anchor="ctr"/>
           <a:lstStyle/>
           <a:p>
-            <a:pPr algn="ctr" indent="0" marL="0">
+            <a:pPr marL="0" indent="0" algn="ctr">
               <a:buNone/>
             </a:pPr>
             <a:r>
@@ -9280,7 +9192,7 @@
           <a:bodyPr wrap="square" lIns="0" tIns="0" rIns="0" bIns="0" rtlCol="0" anchor="ctr"/>
           <a:lstStyle/>
           <a:p>
-            <a:pPr algn="ctr" indent="0" marL="0">
+            <a:pPr marL="0" indent="0" algn="ctr">
               <a:buNone/>
             </a:pPr>
             <a:r>
@@ -9368,7 +9280,7 @@
           <a:bodyPr wrap="square" lIns="0" tIns="0" rIns="0" bIns="0" rtlCol="0" anchor="ctr"/>
           <a:lstStyle/>
           <a:p>
-            <a:pPr algn="ctr" indent="0" marL="0">
+            <a:pPr marL="0" indent="0" algn="ctr">
               <a:buNone/>
             </a:pPr>
             <a:r>
@@ -9407,7 +9319,7 @@
           <a:bodyPr wrap="square" lIns="0" tIns="0" rIns="0" bIns="0" rtlCol="0" anchor="ctr"/>
           <a:lstStyle/>
           <a:p>
-            <a:pPr algn="ctr" indent="0" marL="0">
+            <a:pPr marL="0" indent="0" algn="ctr">
               <a:buNone/>
             </a:pPr>
             <a:r>
@@ -9446,7 +9358,7 @@
           <a:bodyPr wrap="square" lIns="0" tIns="0" rIns="0" bIns="0" rtlCol="0" anchor="ctr"/>
           <a:lstStyle/>
           <a:p>
-            <a:pPr algn="ctr" indent="0" marL="0">
+            <a:pPr marL="0" indent="0" algn="ctr">
               <a:lnSpc>
                 <a:spcPct val="115000"/>
               </a:lnSpc>
@@ -9466,7 +9378,7 @@
             <a:endParaRPr lang="en-US" sz="2200" dirty="0"/>
           </a:p>
           <a:p>
-            <a:pPr algn="ctr" indent="0" marL="0">
+            <a:pPr marL="0" indent="0" algn="ctr">
               <a:lnSpc>
                 <a:spcPct val="115000"/>
               </a:lnSpc>
@@ -9508,11 +9420,11 @@
           <a:bodyPr wrap="square" lIns="0" tIns="0" rIns="0" bIns="0" rtlCol="0" anchor="ctr"/>
           <a:lstStyle/>
           <a:p>
-            <a:pPr algn="ctr" indent="0" marL="0">
+            <a:pPr marL="0" indent="0" algn="ctr">
               <a:buNone/>
             </a:pPr>
             <a:r>
-              <a:rPr lang="en-US" sz="1050" b="1" spc="100" kern="0" dirty="0">
+              <a:rPr lang="en-US" sz="1050" b="1" kern="0" spc="100" dirty="0">
                 <a:solidFill>
                   <a:srgbClr val="0FA3A3"/>
                 </a:solidFill>
@@ -9547,7 +9459,7 @@
           <a:bodyPr wrap="square" lIns="0" tIns="0" rIns="0" bIns="0" rtlCol="0" anchor="ctr"/>
           <a:lstStyle/>
           <a:p>
-            <a:pPr algn="ctr" indent="0" marL="0">
+            <a:pPr marL="0" indent="0" algn="ctr">
               <a:buNone/>
             </a:pPr>
             <a:r>
@@ -9581,6 +9493,7 @@
         <a:solidFill>
           <a:srgbClr val="FBFBFD"/>
         </a:solidFill>
+        <a:effectLst/>
       </p:bgPr>
     </p:bg>
     <p:spTree>
@@ -9618,7 +9531,7 @@
           <a:bodyPr wrap="square" lIns="0" tIns="0" rIns="0" bIns="0" rtlCol="0" anchor="ctr"/>
           <a:lstStyle/>
           <a:p>
-            <a:pPr indent="0" marL="0">
+            <a:pPr marL="0" indent="0">
               <a:buNone/>
             </a:pPr>
             <a:r>
@@ -9657,7 +9570,7 @@
           <a:bodyPr wrap="square" lIns="0" tIns="0" rIns="0" bIns="0" rtlCol="0" anchor="ctr"/>
           <a:lstStyle/>
           <a:p>
-            <a:pPr indent="0" marL="0">
+            <a:pPr marL="0" indent="0">
               <a:buNone/>
             </a:pPr>
             <a:r>
@@ -9701,7 +9614,7 @@
             <a:prstDash val="solid"/>
           </a:ln>
           <a:effectLst>
-            <a:outerShdw sx="100000" sy="100000" kx="0" ky="0" algn="bl" rotWithShape="0" blurRad="76200" dist="25400" dir="5400000">
+            <a:outerShdw blurRad="76200" dist="25400" dir="5400000" algn="bl" rotWithShape="0">
               <a:srgbClr val="5B6B87">
                 <a:alpha val="18000"/>
               </a:srgbClr>
@@ -9730,7 +9643,7 @@
           <a:bodyPr wrap="square" lIns="0" tIns="0" rIns="0" bIns="0" rtlCol="0" anchor="ctr"/>
           <a:lstStyle/>
           <a:p>
-            <a:pPr indent="0" marL="0">
+            <a:pPr marL="0" indent="0">
               <a:buNone/>
             </a:pPr>
             <a:r>
@@ -9860,7 +9773,7 @@
           <a:bodyPr wrap="square" lIns="0" tIns="0" rIns="0" bIns="0" rtlCol="0" anchor="ctr"/>
           <a:lstStyle/>
           <a:p>
-            <a:pPr indent="0" marL="0">
+            <a:pPr marL="0" indent="0">
               <a:buNone/>
             </a:pPr>
             <a:r>
@@ -9899,7 +9812,7 @@
           <a:bodyPr wrap="square" lIns="0" tIns="0" rIns="0" bIns="0" rtlCol="0" anchor="ctr"/>
           <a:lstStyle/>
           <a:p>
-            <a:pPr indent="0" marL="0">
+            <a:pPr marL="0" indent="0">
               <a:buNone/>
             </a:pPr>
             <a:r>
@@ -9938,7 +9851,7 @@
           <a:bodyPr wrap="square" lIns="0" tIns="0" rIns="0" bIns="0" rtlCol="0" anchor="ctr"/>
           <a:lstStyle/>
           <a:p>
-            <a:pPr indent="0" marL="0">
+            <a:pPr marL="0" indent="0">
               <a:buNone/>
             </a:pPr>
             <a:r>
@@ -9982,7 +9895,7 @@
             <a:prstDash val="solid"/>
           </a:ln>
           <a:effectLst>
-            <a:outerShdw sx="100000" sy="100000" kx="0" ky="0" algn="bl" rotWithShape="0" blurRad="76200" dist="25400" dir="5400000">
+            <a:outerShdw blurRad="76200" dist="25400" dir="5400000" algn="bl" rotWithShape="0">
               <a:srgbClr val="5B6B87">
                 <a:alpha val="18000"/>
               </a:srgbClr>
@@ -10011,7 +9924,7 @@
           <a:bodyPr wrap="square" lIns="0" tIns="0" rIns="0" bIns="0" rtlCol="0" anchor="ctr"/>
           <a:lstStyle/>
           <a:p>
-            <a:pPr indent="0" marL="0">
+            <a:pPr marL="0" indent="0">
               <a:buNone/>
             </a:pPr>
             <a:r>
@@ -10038,7 +9951,7 @@
         <p:spPr>
           <a:xfrm>
             <a:off x="9052560" y="2788920"/>
-            <a:ext cx="0" cy="-329184"/>
+            <a:ext cx="0" cy="0"/>
           </a:xfrm>
           <a:prstGeom prst="line">
             <a:avLst/>
@@ -10062,7 +9975,7 @@
         <p:spPr>
           <a:xfrm>
             <a:off x="9052560" y="2788920"/>
-            <a:ext cx="-329184" cy="219456"/>
+            <a:ext cx="0" cy="219456"/>
           </a:xfrm>
           <a:prstGeom prst="line">
             <a:avLst/>
@@ -10222,7 +10135,7 @@
           <a:bodyPr wrap="square" lIns="0" tIns="0" rIns="0" bIns="0" rtlCol="0" anchor="ctr"/>
           <a:lstStyle/>
           <a:p>
-            <a:pPr indent="0" marL="0">
+            <a:pPr marL="0" indent="0">
               <a:buNone/>
             </a:pPr>
             <a:r>
@@ -10261,7 +10174,7 @@
           <a:bodyPr wrap="square" lIns="0" tIns="0" rIns="0" bIns="0" rtlCol="0" anchor="ctr"/>
           <a:lstStyle/>
           <a:p>
-            <a:pPr indent="0" marL="0">
+            <a:pPr marL="0" indent="0">
               <a:buNone/>
             </a:pPr>
             <a:r>
@@ -10300,7 +10213,7 @@
           <a:bodyPr wrap="square" lIns="0" tIns="0" rIns="0" bIns="0" rtlCol="0" anchor="ctr"/>
           <a:lstStyle/>
           <a:p>
-            <a:pPr indent="0" marL="0">
+            <a:pPr marL="0" indent="0">
               <a:buNone/>
             </a:pPr>
             <a:r>
@@ -10339,7 +10252,7 @@
           </a:solidFill>
           <a:ln/>
           <a:effectLst>
-            <a:outerShdw sx="100000" sy="100000" kx="0" ky="0" algn="bl" rotWithShape="0" blurRad="76200" dist="25400" dir="5400000">
+            <a:outerShdw blurRad="76200" dist="25400" dir="5400000" algn="bl" rotWithShape="0">
               <a:srgbClr val="5B6B87">
                 <a:alpha val="18000"/>
               </a:srgbClr>
@@ -10368,7 +10281,7 @@
           <a:bodyPr wrap="square" lIns="0" tIns="0" rIns="0" bIns="0" rtlCol="0" anchor="ctr"/>
           <a:lstStyle/>
           <a:p>
-            <a:pPr algn="ctr" indent="0" marL="0">
+            <a:pPr marL="0" indent="0" algn="ctr">
               <a:buNone/>
             </a:pPr>
             <a:r>
@@ -10407,7 +10320,7 @@
           <a:bodyPr wrap="square" lIns="0" tIns="0" rIns="0" bIns="0" rtlCol="0" anchor="ctr"/>
           <a:lstStyle/>
           <a:p>
-            <a:pPr indent="0" marL="0">
+            <a:pPr marL="0" indent="0">
               <a:buNone/>
             </a:pPr>
             <a:r>
@@ -10446,7 +10359,7 @@
           <a:bodyPr wrap="square" lIns="0" tIns="0" rIns="0" bIns="0" rtlCol="0" anchor="ctr"/>
           <a:lstStyle/>
           <a:p>
-            <a:pPr algn="r" indent="0" marL="0">
+            <a:pPr marL="0" indent="0" algn="r">
               <a:buNone/>
             </a:pPr>
             <a:r>
@@ -10480,6 +10393,7 @@
         <a:solidFill>
           <a:srgbClr val="FBFBFD"/>
         </a:solidFill>
+        <a:effectLst/>
       </p:bgPr>
     </p:bg>
     <p:spTree>
@@ -10517,7 +10431,7 @@
           <a:bodyPr wrap="square" lIns="0" tIns="0" rIns="0" bIns="0" rtlCol="0" anchor="ctr"/>
           <a:lstStyle/>
           <a:p>
-            <a:pPr indent="0" marL="0">
+            <a:pPr marL="0" indent="0">
               <a:buNone/>
             </a:pPr>
             <a:r>
@@ -10556,7 +10470,7 @@
           <a:bodyPr wrap="square" lIns="0" tIns="0" rIns="0" bIns="0" rtlCol="0" anchor="ctr"/>
           <a:lstStyle/>
           <a:p>
-            <a:pPr indent="0" marL="0">
+            <a:pPr marL="0" indent="0">
               <a:buNone/>
             </a:pPr>
             <a:r>
@@ -10600,7 +10514,7 @@
             <a:prstDash val="solid"/>
           </a:ln>
           <a:effectLst>
-            <a:outerShdw sx="100000" sy="100000" kx="0" ky="0" algn="bl" rotWithShape="0" blurRad="76200" dist="25400" dir="5400000">
+            <a:outerShdw blurRad="76200" dist="25400" dir="5400000" algn="bl" rotWithShape="0">
               <a:srgbClr val="5B6B87">
                 <a:alpha val="18000"/>
               </a:srgbClr>
@@ -10654,7 +10568,7 @@
           <a:bodyPr wrap="square" lIns="0" tIns="0" rIns="0" bIns="0" rtlCol="0" anchor="ctr"/>
           <a:lstStyle/>
           <a:p>
-            <a:pPr algn="ctr" indent="0" marL="0">
+            <a:pPr marL="0" indent="0" algn="ctr">
               <a:buNone/>
             </a:pPr>
             <a:r>
@@ -10693,7 +10607,7 @@
           <a:bodyPr wrap="square" lIns="0" tIns="0" rIns="0" bIns="0" rtlCol="0" anchor="ctr"/>
           <a:lstStyle/>
           <a:p>
-            <a:pPr indent="0" marL="0">
+            <a:pPr marL="0" indent="0">
               <a:buNone/>
             </a:pPr>
             <a:r>
@@ -10732,7 +10646,7 @@
           <a:bodyPr wrap="square" lIns="0" tIns="0" rIns="0" bIns="0" rtlCol="0" anchor="ctr"/>
           <a:lstStyle/>
           <a:p>
-            <a:pPr indent="0" marL="0">
+            <a:pPr marL="0" indent="0">
               <a:buNone/>
             </a:pPr>
             <a:r>
@@ -10776,7 +10690,7 @@
             <a:prstDash val="solid"/>
           </a:ln>
           <a:effectLst>
-            <a:outerShdw sx="100000" sy="100000" kx="0" ky="0" algn="bl" rotWithShape="0" blurRad="76200" dist="25400" dir="5400000">
+            <a:outerShdw blurRad="76200" dist="25400" dir="5400000" algn="bl" rotWithShape="0">
               <a:srgbClr val="5B6B87">
                 <a:alpha val="18000"/>
               </a:srgbClr>
@@ -10830,7 +10744,7 @@
           <a:bodyPr wrap="square" lIns="0" tIns="0" rIns="0" bIns="0" rtlCol="0" anchor="ctr"/>
           <a:lstStyle/>
           <a:p>
-            <a:pPr algn="ctr" indent="0" marL="0">
+            <a:pPr marL="0" indent="0" algn="ctr">
               <a:buNone/>
             </a:pPr>
             <a:r>
@@ -10869,7 +10783,7 @@
           <a:bodyPr wrap="square" lIns="0" tIns="0" rIns="0" bIns="0" rtlCol="0" anchor="ctr"/>
           <a:lstStyle/>
           <a:p>
-            <a:pPr indent="0" marL="0">
+            <a:pPr marL="0" indent="0">
               <a:buNone/>
             </a:pPr>
             <a:r>
@@ -10908,7 +10822,7 @@
           <a:bodyPr wrap="square" lIns="0" tIns="0" rIns="0" bIns="0" rtlCol="0" anchor="ctr"/>
           <a:lstStyle/>
           <a:p>
-            <a:pPr indent="0" marL="0">
+            <a:pPr marL="0" indent="0">
               <a:buNone/>
             </a:pPr>
             <a:r>
@@ -10952,7 +10866,7 @@
             <a:prstDash val="solid"/>
           </a:ln>
           <a:effectLst>
-            <a:outerShdw sx="100000" sy="100000" kx="0" ky="0" algn="bl" rotWithShape="0" blurRad="76200" dist="25400" dir="5400000">
+            <a:outerShdw blurRad="76200" dist="25400" dir="5400000" algn="bl" rotWithShape="0">
               <a:srgbClr val="5B6B87">
                 <a:alpha val="18000"/>
               </a:srgbClr>
@@ -11006,7 +10920,7 @@
           <a:bodyPr wrap="square" lIns="0" tIns="0" rIns="0" bIns="0" rtlCol="0" anchor="ctr"/>
           <a:lstStyle/>
           <a:p>
-            <a:pPr algn="ctr" indent="0" marL="0">
+            <a:pPr marL="0" indent="0" algn="ctr">
               <a:buNone/>
             </a:pPr>
             <a:r>
@@ -11045,7 +10959,7 @@
           <a:bodyPr wrap="square" lIns="0" tIns="0" rIns="0" bIns="0" rtlCol="0" anchor="ctr"/>
           <a:lstStyle/>
           <a:p>
-            <a:pPr indent="0" marL="0">
+            <a:pPr marL="0" indent="0">
               <a:buNone/>
             </a:pPr>
             <a:r>
@@ -11084,7 +10998,7 @@
           <a:bodyPr wrap="square" lIns="0" tIns="0" rIns="0" bIns="0" rtlCol="0" anchor="ctr"/>
           <a:lstStyle/>
           <a:p>
-            <a:pPr indent="0" marL="0">
+            <a:pPr marL="0" indent="0">
               <a:buNone/>
             </a:pPr>
             <a:r>
@@ -11128,7 +11042,7 @@
             <a:prstDash val="solid"/>
           </a:ln>
           <a:effectLst>
-            <a:outerShdw sx="100000" sy="100000" kx="0" ky="0" algn="bl" rotWithShape="0" blurRad="76200" dist="25400" dir="5400000">
+            <a:outerShdw blurRad="76200" dist="25400" dir="5400000" algn="bl" rotWithShape="0">
               <a:srgbClr val="5B6B87">
                 <a:alpha val="18000"/>
               </a:srgbClr>
@@ -11182,7 +11096,7 @@
           <a:bodyPr wrap="square" lIns="0" tIns="0" rIns="0" bIns="0" rtlCol="0" anchor="ctr"/>
           <a:lstStyle/>
           <a:p>
-            <a:pPr algn="ctr" indent="0" marL="0">
+            <a:pPr marL="0" indent="0" algn="ctr">
               <a:buNone/>
             </a:pPr>
             <a:r>
@@ -11221,7 +11135,7 @@
           <a:bodyPr wrap="square" lIns="0" tIns="0" rIns="0" bIns="0" rtlCol="0" anchor="ctr"/>
           <a:lstStyle/>
           <a:p>
-            <a:pPr indent="0" marL="0">
+            <a:pPr marL="0" indent="0">
               <a:buNone/>
             </a:pPr>
             <a:r>
@@ -11260,7 +11174,7 @@
           <a:bodyPr wrap="square" lIns="0" tIns="0" rIns="0" bIns="0" rtlCol="0" anchor="ctr"/>
           <a:lstStyle/>
           <a:p>
-            <a:pPr indent="0" marL="0">
+            <a:pPr marL="0" indent="0">
               <a:buNone/>
             </a:pPr>
             <a:r>
@@ -11299,7 +11213,7 @@
           <a:bodyPr wrap="square" lIns="0" tIns="0" rIns="0" bIns="0" rtlCol="0" anchor="ctr"/>
           <a:lstStyle/>
           <a:p>
-            <a:pPr indent="0" marL="0">
+            <a:pPr marL="0" indent="0">
               <a:buNone/>
             </a:pPr>
             <a:r>
@@ -11338,7 +11252,7 @@
           <a:bodyPr wrap="square" lIns="0" tIns="0" rIns="0" bIns="0" rtlCol="0" anchor="ctr"/>
           <a:lstStyle/>
           <a:p>
-            <a:pPr algn="r" indent="0" marL="0">
+            <a:pPr marL="0" indent="0" algn="r">
               <a:buNone/>
             </a:pPr>
             <a:r>
@@ -11372,6 +11286,7 @@
         <a:solidFill>
           <a:srgbClr val="FBFBFD"/>
         </a:solidFill>
+        <a:effectLst/>
       </p:bgPr>
     </p:bg>
     <p:spTree>
@@ -11409,7 +11324,7 @@
           <a:bodyPr wrap="square" lIns="0" tIns="0" rIns="0" bIns="0" rtlCol="0" anchor="ctr"/>
           <a:lstStyle/>
           <a:p>
-            <a:pPr indent="0" marL="0">
+            <a:pPr marL="0" indent="0">
               <a:buNone/>
             </a:pPr>
             <a:r>
@@ -11448,7 +11363,7 @@
           <a:bodyPr wrap="square" lIns="0" tIns="0" rIns="0" bIns="0" rtlCol="0" anchor="ctr"/>
           <a:lstStyle/>
           <a:p>
-            <a:pPr indent="0" marL="0">
+            <a:pPr marL="0" indent="0">
               <a:buNone/>
             </a:pPr>
             <a:r>
@@ -11492,7 +11407,7 @@
             <a:prstDash val="solid"/>
           </a:ln>
           <a:effectLst>
-            <a:outerShdw sx="100000" sy="100000" kx="0" ky="0" algn="bl" rotWithShape="0" blurRad="76200" dist="25400" dir="5400000">
+            <a:outerShdw blurRad="76200" dist="25400" dir="5400000" algn="bl" rotWithShape="0">
               <a:srgbClr val="5B6B87">
                 <a:alpha val="18000"/>
               </a:srgbClr>
@@ -11521,7 +11436,7 @@
           <a:bodyPr wrap="square" lIns="0" tIns="0" rIns="0" bIns="0" rtlCol="0" anchor="ctr"/>
           <a:lstStyle/>
           <a:p>
-            <a:pPr algn="ctr" indent="0" marL="0">
+            <a:pPr marL="0" indent="0" algn="ctr">
               <a:buNone/>
             </a:pPr>
             <a:r>
@@ -11560,7 +11475,7 @@
           <a:bodyPr wrap="square" lIns="0" tIns="0" rIns="0" bIns="0" rtlCol="0" anchor="ctr"/>
           <a:lstStyle/>
           <a:p>
-            <a:pPr algn="ctr" indent="0" marL="0">
+            <a:pPr marL="0" indent="0" algn="ctr">
               <a:buNone/>
             </a:pPr>
             <a:r>
@@ -11724,7 +11639,7 @@
             <a:prstDash val="solid"/>
           </a:ln>
           <a:effectLst>
-            <a:outerShdw sx="100000" sy="100000" kx="0" ky="0" algn="bl" rotWithShape="0" blurRad="76200" dist="25400" dir="5400000">
+            <a:outerShdw blurRad="76200" dist="25400" dir="5400000" algn="bl" rotWithShape="0">
               <a:srgbClr val="5B6B87">
                 <a:alpha val="18000"/>
               </a:srgbClr>
@@ -11753,7 +11668,7 @@
           <a:bodyPr wrap="square" lIns="0" tIns="0" rIns="0" bIns="0" rtlCol="0" anchor="ctr"/>
           <a:lstStyle/>
           <a:p>
-            <a:pPr algn="ctr" indent="0" marL="0">
+            <a:pPr marL="0" indent="0" algn="ctr">
               <a:buNone/>
             </a:pPr>
             <a:r>
@@ -11792,7 +11707,7 @@
           <a:bodyPr wrap="square" lIns="0" tIns="0" rIns="0" bIns="0" rtlCol="0" anchor="ctr"/>
           <a:lstStyle/>
           <a:p>
-            <a:pPr algn="ctr" indent="0" marL="0">
+            <a:pPr marL="0" indent="0" algn="ctr">
               <a:buNone/>
             </a:pPr>
             <a:r>
@@ -11836,7 +11751,7 @@
             <a:prstDash val="solid"/>
           </a:ln>
           <a:effectLst>
-            <a:outerShdw sx="100000" sy="100000" kx="0" ky="0" algn="bl" rotWithShape="0" blurRad="76200" dist="25400" dir="5400000">
+            <a:outerShdw blurRad="76200" dist="25400" dir="5400000" algn="bl" rotWithShape="0">
               <a:srgbClr val="5B6B87">
                 <a:alpha val="18000"/>
               </a:srgbClr>
@@ -11865,7 +11780,7 @@
           <a:bodyPr wrap="square" lIns="0" tIns="0" rIns="0" bIns="0" rtlCol="0" anchor="ctr"/>
           <a:lstStyle/>
           <a:p>
-            <a:pPr algn="ctr" indent="0" marL="0">
+            <a:pPr marL="0" indent="0" algn="ctr">
               <a:buNone/>
             </a:pPr>
             <a:r>
@@ -11904,7 +11819,7 @@
           <a:bodyPr wrap="square" lIns="0" tIns="0" rIns="0" bIns="0" rtlCol="0" anchor="ctr"/>
           <a:lstStyle/>
           <a:p>
-            <a:pPr algn="ctr" indent="0" marL="0">
+            <a:pPr marL="0" indent="0" algn="ctr">
               <a:buNone/>
             </a:pPr>
             <a:r>
@@ -11948,7 +11863,7 @@
             <a:prstDash val="solid"/>
           </a:ln>
           <a:effectLst>
-            <a:outerShdw sx="100000" sy="100000" kx="0" ky="0" algn="bl" rotWithShape="0" blurRad="76200" dist="25400" dir="5400000">
+            <a:outerShdw blurRad="76200" dist="25400" dir="5400000" algn="bl" rotWithShape="0">
               <a:srgbClr val="5B6B87">
                 <a:alpha val="18000"/>
               </a:srgbClr>
@@ -11977,7 +11892,7 @@
           <a:bodyPr wrap="square" lIns="0" tIns="0" rIns="0" bIns="0" rtlCol="0" anchor="ctr"/>
           <a:lstStyle/>
           <a:p>
-            <a:pPr algn="ctr" indent="0" marL="0">
+            <a:pPr marL="0" indent="0" algn="ctr">
               <a:buNone/>
             </a:pPr>
             <a:r>
@@ -12016,7 +11931,7 @@
           <a:bodyPr wrap="square" lIns="0" tIns="0" rIns="0" bIns="0" rtlCol="0" anchor="ctr"/>
           <a:lstStyle/>
           <a:p>
-            <a:pPr algn="ctr" indent="0" marL="0">
+            <a:pPr marL="0" indent="0" algn="ctr">
               <a:buNone/>
             </a:pPr>
             <a:r>
@@ -12060,7 +11975,7 @@
             <a:prstDash val="solid"/>
           </a:ln>
           <a:effectLst>
-            <a:outerShdw sx="100000" sy="100000" kx="0" ky="0" algn="bl" rotWithShape="0" blurRad="76200" dist="25400" dir="5400000">
+            <a:outerShdw blurRad="76200" dist="25400" dir="5400000" algn="bl" rotWithShape="0">
               <a:srgbClr val="5B6B87">
                 <a:alpha val="18000"/>
               </a:srgbClr>
@@ -12089,7 +12004,7 @@
           <a:bodyPr wrap="square" lIns="0" tIns="0" rIns="0" bIns="0" rtlCol="0" anchor="ctr"/>
           <a:lstStyle/>
           <a:p>
-            <a:pPr algn="ctr" indent="0" marL="0">
+            <a:pPr marL="0" indent="0" algn="ctr">
               <a:buNone/>
             </a:pPr>
             <a:r>
@@ -12128,7 +12043,7 @@
           <a:bodyPr wrap="square" lIns="0" tIns="0" rIns="0" bIns="0" rtlCol="0" anchor="ctr"/>
           <a:lstStyle/>
           <a:p>
-            <a:pPr algn="ctr" indent="0" marL="0">
+            <a:pPr marL="0" indent="0" algn="ctr">
               <a:buNone/>
             </a:pPr>
             <a:r>
@@ -12172,7 +12087,7 @@
             <a:prstDash val="solid"/>
           </a:ln>
           <a:effectLst>
-            <a:outerShdw sx="100000" sy="100000" kx="0" ky="0" algn="bl" rotWithShape="0" blurRad="76200" dist="25400" dir="5400000">
+            <a:outerShdw blurRad="76200" dist="25400" dir="5400000" algn="bl" rotWithShape="0">
               <a:srgbClr val="5B6B87">
                 <a:alpha val="18000"/>
               </a:srgbClr>
@@ -12201,7 +12116,7 @@
           <a:bodyPr wrap="square" lIns="0" tIns="0" rIns="0" bIns="0" rtlCol="0" anchor="ctr"/>
           <a:lstStyle/>
           <a:p>
-            <a:pPr algn="ctr" indent="0" marL="0">
+            <a:pPr marL="0" indent="0" algn="ctr">
               <a:buNone/>
             </a:pPr>
             <a:r>
@@ -12240,7 +12155,7 @@
           <a:bodyPr wrap="square" lIns="0" tIns="0" rIns="0" bIns="0" rtlCol="0" anchor="ctr"/>
           <a:lstStyle/>
           <a:p>
-            <a:pPr algn="ctr" indent="0" marL="0">
+            <a:pPr marL="0" indent="0" algn="ctr">
               <a:buNone/>
             </a:pPr>
             <a:r>
@@ -12375,7 +12290,7 @@
           </a:solidFill>
           <a:ln/>
           <a:effectLst>
-            <a:outerShdw sx="100000" sy="100000" kx="0" ky="0" algn="bl" rotWithShape="0" blurRad="76200" dist="25400" dir="5400000">
+            <a:outerShdw blurRad="76200" dist="25400" dir="5400000" algn="bl" rotWithShape="0">
               <a:srgbClr val="5B6B87">
                 <a:alpha val="18000"/>
               </a:srgbClr>
@@ -12404,7 +12319,7 @@
           <a:bodyPr wrap="square" lIns="0" tIns="0" rIns="0" bIns="0" rtlCol="0" anchor="ctr"/>
           <a:lstStyle/>
           <a:p>
-            <a:pPr algn="ctr" indent="0" marL="0">
+            <a:pPr marL="0" indent="0" algn="ctr">
               <a:buNone/>
             </a:pPr>
             <a:r>
@@ -12443,7 +12358,7 @@
           <a:bodyPr wrap="square" lIns="0" tIns="0" rIns="0" bIns="0" rtlCol="0" anchor="ctr"/>
           <a:lstStyle/>
           <a:p>
-            <a:pPr indent="0" marL="0">
+            <a:pPr marL="0" indent="0">
               <a:buNone/>
             </a:pPr>
             <a:r>
@@ -12482,7 +12397,7 @@
           <a:bodyPr wrap="square" lIns="0" tIns="0" rIns="0" bIns="0" rtlCol="0" anchor="ctr"/>
           <a:lstStyle/>
           <a:p>
-            <a:pPr algn="r" indent="0" marL="0">
+            <a:pPr marL="0" indent="0" algn="r">
               <a:buNone/>
             </a:pPr>
             <a:r>
@@ -12516,6 +12431,7 @@
         <a:solidFill>
           <a:srgbClr val="FBFBFD"/>
         </a:solidFill>
+        <a:effectLst/>
       </p:bgPr>
     </p:bg>
     <p:spTree>
@@ -12553,7 +12469,7 @@
           <a:bodyPr wrap="square" lIns="0" tIns="0" rIns="0" bIns="0" rtlCol="0" anchor="ctr"/>
           <a:lstStyle/>
           <a:p>
-            <a:pPr indent="0" marL="0">
+            <a:pPr marL="0" indent="0">
               <a:buNone/>
             </a:pPr>
             <a:r>
@@ -12592,7 +12508,7 @@
           <a:bodyPr wrap="square" lIns="0" tIns="0" rIns="0" bIns="0" rtlCol="0" anchor="ctr"/>
           <a:lstStyle/>
           <a:p>
-            <a:pPr indent="0" marL="0">
+            <a:pPr marL="0" indent="0">
               <a:buNone/>
             </a:pPr>
             <a:r>
@@ -12636,7 +12552,7 @@
             <a:prstDash val="solid"/>
           </a:ln>
           <a:effectLst>
-            <a:outerShdw sx="100000" sy="100000" kx="0" ky="0" algn="bl" rotWithShape="0" blurRad="76200" dist="25400" dir="5400000">
+            <a:outerShdw blurRad="76200" dist="25400" dir="5400000" algn="bl" rotWithShape="0">
               <a:srgbClr val="5B6B87">
                 <a:alpha val="18000"/>
               </a:srgbClr>
@@ -12690,7 +12606,7 @@
           <a:bodyPr wrap="square" lIns="0" tIns="0" rIns="0" bIns="0" rtlCol="0" anchor="ctr"/>
           <a:lstStyle/>
           <a:p>
-            <a:pPr algn="ctr" indent="0" marL="0">
+            <a:pPr marL="0" indent="0" algn="ctr">
               <a:buNone/>
             </a:pPr>
             <a:r>
@@ -12729,7 +12645,7 @@
           <a:bodyPr wrap="square" lIns="0" tIns="0" rIns="0" bIns="0" rtlCol="0" anchor="ctr"/>
           <a:lstStyle/>
           <a:p>
-            <a:pPr indent="0" marL="0">
+            <a:pPr marL="0" indent="0">
               <a:buNone/>
             </a:pPr>
             <a:r>
@@ -12768,7 +12684,7 @@
           <a:bodyPr wrap="square" lIns="0" tIns="0" rIns="0" bIns="0" rtlCol="0" anchor="ctr"/>
           <a:lstStyle/>
           <a:p>
-            <a:pPr indent="0" marL="0">
+            <a:pPr marL="0" indent="0">
               <a:buNone/>
             </a:pPr>
             <a:r>
@@ -12807,7 +12723,7 @@
           <a:bodyPr wrap="square" lIns="0" tIns="0" rIns="0" bIns="0" rtlCol="0" anchor="ctr"/>
           <a:lstStyle/>
           <a:p>
-            <a:pPr indent="0" marL="0">
+            <a:pPr marL="0" indent="0">
               <a:lnSpc>
                 <a:spcPct val="108000"/>
               </a:lnSpc>
@@ -12854,7 +12770,7 @@
             <a:prstDash val="solid"/>
           </a:ln>
           <a:effectLst>
-            <a:outerShdw sx="100000" sy="100000" kx="0" ky="0" algn="bl" rotWithShape="0" blurRad="76200" dist="25400" dir="5400000">
+            <a:outerShdw blurRad="76200" dist="25400" dir="5400000" algn="bl" rotWithShape="0">
               <a:srgbClr val="5B6B87">
                 <a:alpha val="18000"/>
               </a:srgbClr>
@@ -12908,7 +12824,7 @@
           <a:bodyPr wrap="square" lIns="0" tIns="0" rIns="0" bIns="0" rtlCol="0" anchor="ctr"/>
           <a:lstStyle/>
           <a:p>
-            <a:pPr algn="ctr" indent="0" marL="0">
+            <a:pPr marL="0" indent="0" algn="ctr">
               <a:buNone/>
             </a:pPr>
             <a:r>
@@ -12947,7 +12863,7 @@
           <a:bodyPr wrap="square" lIns="0" tIns="0" rIns="0" bIns="0" rtlCol="0" anchor="ctr"/>
           <a:lstStyle/>
           <a:p>
-            <a:pPr indent="0" marL="0">
+            <a:pPr marL="0" indent="0">
               <a:buNone/>
             </a:pPr>
             <a:r>
@@ -12986,7 +12902,7 @@
           <a:bodyPr wrap="square" lIns="0" tIns="0" rIns="0" bIns="0" rtlCol="0" anchor="ctr"/>
           <a:lstStyle/>
           <a:p>
-            <a:pPr indent="0" marL="0">
+            <a:pPr marL="0" indent="0">
               <a:buNone/>
             </a:pPr>
             <a:r>
@@ -13025,7 +12941,7 @@
           <a:bodyPr wrap="square" lIns="0" tIns="0" rIns="0" bIns="0" rtlCol="0" anchor="ctr"/>
           <a:lstStyle/>
           <a:p>
-            <a:pPr indent="0" marL="0">
+            <a:pPr marL="0" indent="0">
               <a:lnSpc>
                 <a:spcPct val="108000"/>
               </a:lnSpc>
@@ -13072,7 +12988,7 @@
             <a:prstDash val="solid"/>
           </a:ln>
           <a:effectLst>
-            <a:outerShdw sx="100000" sy="100000" kx="0" ky="0" algn="bl" rotWithShape="0" blurRad="76200" dist="25400" dir="5400000">
+            <a:outerShdw blurRad="76200" dist="25400" dir="5400000" algn="bl" rotWithShape="0">
               <a:srgbClr val="5B6B87">
                 <a:alpha val="18000"/>
               </a:srgbClr>
@@ -13126,7 +13042,7 @@
           <a:bodyPr wrap="square" lIns="0" tIns="0" rIns="0" bIns="0" rtlCol="0" anchor="ctr"/>
           <a:lstStyle/>
           <a:p>
-            <a:pPr algn="ctr" indent="0" marL="0">
+            <a:pPr marL="0" indent="0" algn="ctr">
               <a:buNone/>
             </a:pPr>
             <a:r>
@@ -13165,7 +13081,7 @@
           <a:bodyPr wrap="square" lIns="0" tIns="0" rIns="0" bIns="0" rtlCol="0" anchor="ctr"/>
           <a:lstStyle/>
           <a:p>
-            <a:pPr indent="0" marL="0">
+            <a:pPr marL="0" indent="0">
               <a:buNone/>
             </a:pPr>
             <a:r>
@@ -13204,7 +13120,7 @@
           <a:bodyPr wrap="square" lIns="0" tIns="0" rIns="0" bIns="0" rtlCol="0" anchor="ctr"/>
           <a:lstStyle/>
           <a:p>
-            <a:pPr indent="0" marL="0">
+            <a:pPr marL="0" indent="0">
               <a:buNone/>
             </a:pPr>
             <a:r>
@@ -13243,7 +13159,7 @@
           <a:bodyPr wrap="square" lIns="0" tIns="0" rIns="0" bIns="0" rtlCol="0" anchor="ctr"/>
           <a:lstStyle/>
           <a:p>
-            <a:pPr indent="0" marL="0">
+            <a:pPr marL="0" indent="0">
               <a:lnSpc>
                 <a:spcPct val="108000"/>
               </a:lnSpc>
@@ -13290,7 +13206,7 @@
             <a:prstDash val="solid"/>
           </a:ln>
           <a:effectLst>
-            <a:outerShdw sx="100000" sy="100000" kx="0" ky="0" algn="bl" rotWithShape="0" blurRad="76200" dist="25400" dir="5400000">
+            <a:outerShdw blurRad="76200" dist="25400" dir="5400000" algn="bl" rotWithShape="0">
               <a:srgbClr val="5B6B87">
                 <a:alpha val="18000"/>
               </a:srgbClr>
@@ -13344,7 +13260,7 @@
           <a:bodyPr wrap="square" lIns="0" tIns="0" rIns="0" bIns="0" rtlCol="0" anchor="ctr"/>
           <a:lstStyle/>
           <a:p>
-            <a:pPr algn="ctr" indent="0" marL="0">
+            <a:pPr marL="0" indent="0" algn="ctr">
               <a:buNone/>
             </a:pPr>
             <a:r>
@@ -13383,7 +13299,7 @@
           <a:bodyPr wrap="square" lIns="0" tIns="0" rIns="0" bIns="0" rtlCol="0" anchor="ctr"/>
           <a:lstStyle/>
           <a:p>
-            <a:pPr indent="0" marL="0">
+            <a:pPr marL="0" indent="0">
               <a:buNone/>
             </a:pPr>
             <a:r>
@@ -13422,7 +13338,7 @@
           <a:bodyPr wrap="square" lIns="0" tIns="0" rIns="0" bIns="0" rtlCol="0" anchor="ctr"/>
           <a:lstStyle/>
           <a:p>
-            <a:pPr indent="0" marL="0">
+            <a:pPr marL="0" indent="0">
               <a:buNone/>
             </a:pPr>
             <a:r>
@@ -13461,7 +13377,7 @@
           <a:bodyPr wrap="square" lIns="0" tIns="0" rIns="0" bIns="0" rtlCol="0" anchor="ctr"/>
           <a:lstStyle/>
           <a:p>
-            <a:pPr indent="0" marL="0">
+            <a:pPr marL="0" indent="0">
               <a:lnSpc>
                 <a:spcPct val="108000"/>
               </a:lnSpc>
@@ -13503,7 +13419,7 @@
           <a:bodyPr wrap="square" lIns="0" tIns="0" rIns="0" bIns="0" rtlCol="0" anchor="ctr"/>
           <a:lstStyle/>
           <a:p>
-            <a:pPr indent="0" marL="0">
+            <a:pPr marL="0" indent="0">
               <a:buNone/>
             </a:pPr>
             <a:r>
@@ -13542,7 +13458,7 @@
           <a:bodyPr wrap="square" lIns="0" tIns="0" rIns="0" bIns="0" rtlCol="0" anchor="ctr"/>
           <a:lstStyle/>
           <a:p>
-            <a:pPr algn="r" indent="0" marL="0">
+            <a:pPr marL="0" indent="0" algn="r">
               <a:buNone/>
             </a:pPr>
             <a:r>
@@ -13576,6 +13492,7 @@
         <a:solidFill>
           <a:srgbClr val="FBFBFD"/>
         </a:solidFill>
+        <a:effectLst/>
       </p:bgPr>
     </p:bg>
     <p:spTree>
@@ -13613,7 +13530,7 @@
           <a:bodyPr wrap="square" lIns="0" tIns="0" rIns="0" bIns="0" rtlCol="0" anchor="ctr"/>
           <a:lstStyle/>
           <a:p>
-            <a:pPr indent="0" marL="0">
+            <a:pPr marL="0" indent="0">
               <a:buNone/>
             </a:pPr>
             <a:r>
@@ -13652,7 +13569,7 @@
           <a:bodyPr wrap="square" lIns="0" tIns="0" rIns="0" bIns="0" rtlCol="0" anchor="ctr"/>
           <a:lstStyle/>
           <a:p>
-            <a:pPr indent="0" marL="0">
+            <a:pPr marL="0" indent="0">
               <a:buNone/>
             </a:pPr>
             <a:r>
@@ -13696,7 +13613,7 @@
             <a:prstDash val="solid"/>
           </a:ln>
           <a:effectLst>
-            <a:outerShdw sx="100000" sy="100000" kx="0" ky="0" algn="bl" rotWithShape="0" blurRad="76200" dist="25400" dir="5400000">
+            <a:outerShdw blurRad="76200" dist="25400" dir="5400000" algn="bl" rotWithShape="0">
               <a:srgbClr val="5B6B87">
                 <a:alpha val="18000"/>
               </a:srgbClr>
@@ -13750,7 +13667,7 @@
           <a:bodyPr wrap="square" lIns="0" tIns="0" rIns="0" bIns="0" rtlCol="0" anchor="ctr"/>
           <a:lstStyle/>
           <a:p>
-            <a:pPr algn="ctr" indent="0" marL="0">
+            <a:pPr marL="0" indent="0" algn="ctr">
               <a:buNone/>
             </a:pPr>
             <a:r>
@@ -13789,7 +13706,7 @@
           <a:bodyPr wrap="square" lIns="0" tIns="0" rIns="0" bIns="0" rtlCol="0" anchor="ctr"/>
           <a:lstStyle/>
           <a:p>
-            <a:pPr indent="0" marL="0">
+            <a:pPr marL="0" indent="0">
               <a:buNone/>
             </a:pPr>
             <a:r>
@@ -13828,7 +13745,7 @@
           <a:bodyPr wrap="square" lIns="0" tIns="0" rIns="0" bIns="0" rtlCol="0" anchor="ctr"/>
           <a:lstStyle/>
           <a:p>
-            <a:pPr indent="0" marL="0">
+            <a:pPr marL="0" indent="0">
               <a:buNone/>
             </a:pPr>
             <a:r>
@@ -13872,7 +13789,7 @@
             <a:prstDash val="solid"/>
           </a:ln>
           <a:effectLst>
-            <a:outerShdw sx="100000" sy="100000" kx="0" ky="0" algn="bl" rotWithShape="0" blurRad="76200" dist="25400" dir="5400000">
+            <a:outerShdw blurRad="76200" dist="25400" dir="5400000" algn="bl" rotWithShape="0">
               <a:srgbClr val="5B6B87">
                 <a:alpha val="18000"/>
               </a:srgbClr>
@@ -13926,7 +13843,7 @@
           <a:bodyPr wrap="square" lIns="0" tIns="0" rIns="0" bIns="0" rtlCol="0" anchor="ctr"/>
           <a:lstStyle/>
           <a:p>
-            <a:pPr algn="ctr" indent="0" marL="0">
+            <a:pPr marL="0" indent="0" algn="ctr">
               <a:buNone/>
             </a:pPr>
             <a:r>
@@ -13965,7 +13882,7 @@
           <a:bodyPr wrap="square" lIns="0" tIns="0" rIns="0" bIns="0" rtlCol="0" anchor="ctr"/>
           <a:lstStyle/>
           <a:p>
-            <a:pPr indent="0" marL="0">
+            <a:pPr marL="0" indent="0">
               <a:buNone/>
             </a:pPr>
             <a:r>
@@ -14004,7 +13921,7 @@
           <a:bodyPr wrap="square" lIns="0" tIns="0" rIns="0" bIns="0" rtlCol="0" anchor="ctr"/>
           <a:lstStyle/>
           <a:p>
-            <a:pPr indent="0" marL="0">
+            <a:pPr marL="0" indent="0">
               <a:buNone/>
             </a:pPr>
             <a:r>
@@ -14048,7 +13965,7 @@
             <a:prstDash val="solid"/>
           </a:ln>
           <a:effectLst>
-            <a:outerShdw sx="100000" sy="100000" kx="0" ky="0" algn="bl" rotWithShape="0" blurRad="76200" dist="25400" dir="5400000">
+            <a:outerShdw blurRad="76200" dist="25400" dir="5400000" algn="bl" rotWithShape="0">
               <a:srgbClr val="5B6B87">
                 <a:alpha val="18000"/>
               </a:srgbClr>
@@ -14102,7 +14019,7 @@
           <a:bodyPr wrap="square" lIns="0" tIns="0" rIns="0" bIns="0" rtlCol="0" anchor="ctr"/>
           <a:lstStyle/>
           <a:p>
-            <a:pPr algn="ctr" indent="0" marL="0">
+            <a:pPr marL="0" indent="0" algn="ctr">
               <a:buNone/>
             </a:pPr>
             <a:r>
@@ -14141,7 +14058,7 @@
           <a:bodyPr wrap="square" lIns="0" tIns="0" rIns="0" bIns="0" rtlCol="0" anchor="ctr"/>
           <a:lstStyle/>
           <a:p>
-            <a:pPr indent="0" marL="0">
+            <a:pPr marL="0" indent="0">
               <a:buNone/>
             </a:pPr>
             <a:r>
@@ -14180,7 +14097,7 @@
           <a:bodyPr wrap="square" lIns="0" tIns="0" rIns="0" bIns="0" rtlCol="0" anchor="ctr"/>
           <a:lstStyle/>
           <a:p>
-            <a:pPr indent="0" marL="0">
+            <a:pPr marL="0" indent="0">
               <a:buNone/>
             </a:pPr>
             <a:r>
@@ -14224,7 +14141,7 @@
             <a:prstDash val="solid"/>
           </a:ln>
           <a:effectLst>
-            <a:outerShdw sx="100000" sy="100000" kx="0" ky="0" algn="bl" rotWithShape="0" blurRad="76200" dist="25400" dir="5400000">
+            <a:outerShdw blurRad="76200" dist="25400" dir="5400000" algn="bl" rotWithShape="0">
               <a:srgbClr val="5B6B87">
                 <a:alpha val="18000"/>
               </a:srgbClr>
@@ -14278,7 +14195,7 @@
           <a:bodyPr wrap="square" lIns="0" tIns="0" rIns="0" bIns="0" rtlCol="0" anchor="ctr"/>
           <a:lstStyle/>
           <a:p>
-            <a:pPr algn="ctr" indent="0" marL="0">
+            <a:pPr marL="0" indent="0" algn="ctr">
               <a:buNone/>
             </a:pPr>
             <a:r>
@@ -14317,7 +14234,7 @@
           <a:bodyPr wrap="square" lIns="0" tIns="0" rIns="0" bIns="0" rtlCol="0" anchor="ctr"/>
           <a:lstStyle/>
           <a:p>
-            <a:pPr indent="0" marL="0">
+            <a:pPr marL="0" indent="0">
               <a:buNone/>
             </a:pPr>
             <a:r>
@@ -14356,7 +14273,7 @@
           <a:bodyPr wrap="square" lIns="0" tIns="0" rIns="0" bIns="0" rtlCol="0" anchor="ctr"/>
           <a:lstStyle/>
           <a:p>
-            <a:pPr indent="0" marL="0">
+            <a:pPr marL="0" indent="0">
               <a:buNone/>
             </a:pPr>
             <a:r>
@@ -14431,7 +14348,7 @@
         <p:spPr>
           <a:xfrm>
             <a:off x="7315200" y="4914900"/>
-            <a:ext cx="-2423160" cy="0"/>
+            <a:ext cx="0" cy="0"/>
           </a:xfrm>
           <a:prstGeom prst="line">
             <a:avLst/>
@@ -14455,7 +14372,7 @@
         <p:spPr>
           <a:xfrm>
             <a:off x="3360420" y="4297680"/>
-            <a:ext cx="0" cy="-1051560"/>
+            <a:ext cx="0" cy="0"/>
           </a:xfrm>
           <a:prstGeom prst="line">
             <a:avLst/>
@@ -14491,7 +14408,7 @@
           <a:bodyPr wrap="square" lIns="0" tIns="0" rIns="0" bIns="0" rtlCol="0" anchor="ctr"/>
           <a:lstStyle/>
           <a:p>
-            <a:pPr algn="ctr" indent="0" marL="0">
+            <a:pPr marL="0" indent="0" algn="ctr">
               <a:lnSpc>
                 <a:spcPct val="115000"/>
               </a:lnSpc>
@@ -14511,7 +14428,7 @@
             <a:endParaRPr lang="en-US" sz="1050" dirty="0"/>
           </a:p>
           <a:p>
-            <a:pPr algn="ctr" indent="0" marL="0">
+            <a:pPr marL="0" indent="0" algn="ctr">
               <a:lnSpc>
                 <a:spcPct val="115000"/>
               </a:lnSpc>
@@ -14531,7 +14448,7 @@
             <a:endParaRPr lang="en-US" sz="1050" dirty="0"/>
           </a:p>
           <a:p>
-            <a:pPr algn="ctr" indent="0" marL="0">
+            <a:pPr marL="0" indent="0" algn="ctr">
               <a:lnSpc>
                 <a:spcPct val="115000"/>
               </a:lnSpc>
@@ -14573,7 +14490,7 @@
           <a:bodyPr wrap="square" lIns="0" tIns="0" rIns="0" bIns="0" rtlCol="0" anchor="ctr"/>
           <a:lstStyle/>
           <a:p>
-            <a:pPr indent="0" marL="0">
+            <a:pPr marL="0" indent="0">
               <a:buNone/>
             </a:pPr>
             <a:r>
@@ -14612,7 +14529,7 @@
           <a:bodyPr wrap="square" lIns="0" tIns="0" rIns="0" bIns="0" rtlCol="0" anchor="ctr"/>
           <a:lstStyle/>
           <a:p>
-            <a:pPr algn="r" indent="0" marL="0">
+            <a:pPr marL="0" indent="0" algn="r">
               <a:buNone/>
             </a:pPr>
             <a:r>
@@ -14646,6 +14563,7 @@
         <a:solidFill>
           <a:srgbClr val="FBFBFD"/>
         </a:solidFill>
+        <a:effectLst/>
       </p:bgPr>
     </p:bg>
     <p:spTree>
@@ -14683,7 +14601,7 @@
           <a:bodyPr wrap="square" lIns="0" tIns="0" rIns="0" bIns="0" rtlCol="0" anchor="ctr"/>
           <a:lstStyle/>
           <a:p>
-            <a:pPr indent="0" marL="0">
+            <a:pPr marL="0" indent="0">
               <a:buNone/>
             </a:pPr>
             <a:r>
@@ -14722,7 +14640,7 @@
           <a:bodyPr wrap="square" lIns="0" tIns="0" rIns="0" bIns="0" rtlCol="0" anchor="ctr"/>
           <a:lstStyle/>
           <a:p>
-            <a:pPr indent="0" marL="0">
+            <a:pPr marL="0" indent="0">
               <a:buNone/>
             </a:pPr>
             <a:r>
@@ -14756,17 +14674,41 @@
         </p:nvGraphicFramePr>
         <p:xfrm>
           <a:off x="548640" y="1965960"/>
-          <a:ext cx="11064240" cy="914400"/>
+          <a:ext cx="11064240" cy="2560320"/>
         </p:xfrm>
         <a:graphic>
           <a:graphicData uri="http://schemas.openxmlformats.org/drawingml/2006/table">
             <a:tbl>
               <a:tblPr/>
               <a:tblGrid>
-                <a:gridCol w="3063240"/>
-                <a:gridCol w="2148840"/>
-                <a:gridCol w="4160520"/>
-                <a:gridCol w="1691640"/>
+                <a:gridCol w="3063240">
+                  <a:extLst>
+                    <a:ext uri="{9D8B030D-6E8A-4147-A177-3AD203B41FA5}">
+                      <a16:colId xmlns:a16="http://schemas.microsoft.com/office/drawing/2014/main" val="20000"/>
+                    </a:ext>
+                  </a:extLst>
+                </a:gridCol>
+                <a:gridCol w="2148840">
+                  <a:extLst>
+                    <a:ext uri="{9D8B030D-6E8A-4147-A177-3AD203B41FA5}">
+                      <a16:colId xmlns:a16="http://schemas.microsoft.com/office/drawing/2014/main" val="20001"/>
+                    </a:ext>
+                  </a:extLst>
+                </a:gridCol>
+                <a:gridCol w="4160520">
+                  <a:extLst>
+                    <a:ext uri="{9D8B030D-6E8A-4147-A177-3AD203B41FA5}">
+                      <a16:colId xmlns:a16="http://schemas.microsoft.com/office/drawing/2014/main" val="20002"/>
+                    </a:ext>
+                  </a:extLst>
+                </a:gridCol>
+                <a:gridCol w="1691640">
+                  <a:extLst>
+                    <a:ext uri="{9D8B030D-6E8A-4147-A177-3AD203B41FA5}">
+                      <a16:colId xmlns:a16="http://schemas.microsoft.com/office/drawing/2014/main" val="20003"/>
+                    </a:ext>
+                  </a:extLst>
+                </a:gridCol>
               </a:tblGrid>
               <a:tr h="640080">
                 <a:tc>
@@ -14774,7 +14716,7 @@
                     <a:bodyPr/>
                     <a:lstStyle/>
                     <a:p>
-                      <a:pPr algn="l" indent="0" marL="0">
+                      <a:pPr marL="0" indent="0" algn="l">
                         <a:buNone/>
                       </a:pPr>
                       <a:r>
@@ -14842,7 +14784,7 @@
                     <a:bodyPr/>
                     <a:lstStyle/>
                     <a:p>
-                      <a:pPr algn="l" indent="0" marL="0">
+                      <a:pPr marL="0" indent="0" algn="l">
                         <a:buNone/>
                       </a:pPr>
                       <a:r>
@@ -14910,7 +14852,7 @@
                     <a:bodyPr/>
                     <a:lstStyle/>
                     <a:p>
-                      <a:pPr algn="l" indent="0" marL="0">
+                      <a:pPr marL="0" indent="0" algn="l">
                         <a:buNone/>
                       </a:pPr>
                       <a:r>
@@ -14978,7 +14920,7 @@
                     <a:bodyPr/>
                     <a:lstStyle/>
                     <a:p>
-                      <a:pPr algn="l" indent="0" marL="0">
+                      <a:pPr marL="0" indent="0" algn="l">
                         <a:buNone/>
                       </a:pPr>
                       <a:r>
@@ -15041,6 +14983,11 @@
                     </a:solidFill>
                   </a:tcPr>
                 </a:tc>
+                <a:extLst>
+                  <a:ext uri="{0D108BD9-81ED-4DB2-BD59-A6C34878D82A}">
+                    <a16:rowId xmlns:a16="http://schemas.microsoft.com/office/drawing/2014/main" val="10000"/>
+                  </a:ext>
+                </a:extLst>
               </a:tr>
               <a:tr h="640080">
                 <a:tc>
@@ -15048,7 +14995,7 @@
                     <a:bodyPr/>
                     <a:lstStyle/>
                     <a:p>
-                      <a:pPr algn="l" indent="0" marL="0">
+                      <a:pPr marL="0" indent="0" algn="l">
                         <a:buNone/>
                       </a:pPr>
                       <a:r>
@@ -15116,7 +15063,7 @@
                     <a:bodyPr/>
                     <a:lstStyle/>
                     <a:p>
-                      <a:pPr algn="l" indent="0" marL="0">
+                      <a:pPr marL="0" indent="0" algn="l">
                         <a:buNone/>
                       </a:pPr>
                       <a:r>
@@ -15184,7 +15131,7 @@
                     <a:bodyPr/>
                     <a:lstStyle/>
                     <a:p>
-                      <a:pPr algn="l" indent="0" marL="0">
+                      <a:pPr marL="0" indent="0" algn="l">
                         <a:buNone/>
                       </a:pPr>
                       <a:r>
@@ -15252,7 +15199,7 @@
                     <a:bodyPr/>
                     <a:lstStyle/>
                     <a:p>
-                      <a:pPr algn="l" indent="0" marL="0">
+                      <a:pPr marL="0" indent="0" algn="l">
                         <a:buNone/>
                       </a:pPr>
                       <a:r>
@@ -15315,6 +15262,11 @@
                     </a:solidFill>
                   </a:tcPr>
                 </a:tc>
+                <a:extLst>
+                  <a:ext uri="{0D108BD9-81ED-4DB2-BD59-A6C34878D82A}">
+                    <a16:rowId xmlns:a16="http://schemas.microsoft.com/office/drawing/2014/main" val="10001"/>
+                  </a:ext>
+                </a:extLst>
               </a:tr>
               <a:tr h="640080">
                 <a:tc>
@@ -15322,7 +15274,7 @@
                     <a:bodyPr/>
                     <a:lstStyle/>
                     <a:p>
-                      <a:pPr algn="l" indent="0" marL="0">
+                      <a:pPr marL="0" indent="0" algn="l">
                         <a:buNone/>
                       </a:pPr>
                       <a:r>
@@ -15390,7 +15342,7 @@
                     <a:bodyPr/>
                     <a:lstStyle/>
                     <a:p>
-                      <a:pPr algn="l" indent="0" marL="0">
+                      <a:pPr marL="0" indent="0" algn="l">
                         <a:buNone/>
                       </a:pPr>
                       <a:r>
@@ -15458,7 +15410,7 @@
                     <a:bodyPr/>
                     <a:lstStyle/>
                     <a:p>
-                      <a:pPr algn="l" indent="0" marL="0">
+                      <a:pPr marL="0" indent="0" algn="l">
                         <a:buNone/>
                       </a:pPr>
                       <a:r>
@@ -15526,7 +15478,7 @@
                     <a:bodyPr/>
                     <a:lstStyle/>
                     <a:p>
-                      <a:pPr algn="l" indent="0" marL="0">
+                      <a:pPr marL="0" indent="0" algn="l">
                         <a:buNone/>
                       </a:pPr>
                       <a:r>
@@ -15589,6 +15541,11 @@
                     </a:solidFill>
                   </a:tcPr>
                 </a:tc>
+                <a:extLst>
+                  <a:ext uri="{0D108BD9-81ED-4DB2-BD59-A6C34878D82A}">
+                    <a16:rowId xmlns:a16="http://schemas.microsoft.com/office/drawing/2014/main" val="10002"/>
+                  </a:ext>
+                </a:extLst>
               </a:tr>
               <a:tr h="640080">
                 <a:tc>
@@ -15596,7 +15553,7 @@
                     <a:bodyPr/>
                     <a:lstStyle/>
                     <a:p>
-                      <a:pPr algn="l" indent="0" marL="0">
+                      <a:pPr marL="0" indent="0" algn="l">
                         <a:buNone/>
                       </a:pPr>
                       <a:r>
@@ -15664,7 +15621,7 @@
                     <a:bodyPr/>
                     <a:lstStyle/>
                     <a:p>
-                      <a:pPr algn="l" indent="0" marL="0">
+                      <a:pPr marL="0" indent="0" algn="l">
                         <a:buNone/>
                       </a:pPr>
                       <a:r>
@@ -15732,7 +15689,7 @@
                     <a:bodyPr/>
                     <a:lstStyle/>
                     <a:p>
-                      <a:pPr algn="l" indent="0" marL="0">
+                      <a:pPr marL="0" indent="0" algn="l">
                         <a:buNone/>
                       </a:pPr>
                       <a:r>
@@ -15800,7 +15757,7 @@
                     <a:bodyPr/>
                     <a:lstStyle/>
                     <a:p>
-                      <a:pPr algn="l" indent="0" marL="0">
+                      <a:pPr marL="0" indent="0" algn="l">
                         <a:buNone/>
                       </a:pPr>
                       <a:r>
@@ -15863,6 +15820,11 @@
                     </a:solidFill>
                   </a:tcPr>
                 </a:tc>
+                <a:extLst>
+                  <a:ext uri="{0D108BD9-81ED-4DB2-BD59-A6C34878D82A}">
+                    <a16:rowId xmlns:a16="http://schemas.microsoft.com/office/drawing/2014/main" val="10003"/>
+                  </a:ext>
+                </a:extLst>
               </a:tr>
             </a:tbl>
           </a:graphicData>
@@ -15889,7 +15851,7 @@
           <a:bodyPr wrap="square" lIns="0" tIns="0" rIns="0" bIns="0" rtlCol="0" anchor="ctr"/>
           <a:lstStyle/>
           <a:p>
-            <a:pPr indent="0" marL="0">
+            <a:pPr marL="0" indent="0">
               <a:buNone/>
             </a:pPr>
             <a:r>
@@ -15928,7 +15890,7 @@
           <a:bodyPr wrap="square" lIns="0" tIns="0" rIns="0" bIns="0" rtlCol="0" anchor="ctr"/>
           <a:lstStyle/>
           <a:p>
-            <a:pPr algn="r" indent="0" marL="0">
+            <a:pPr marL="0" indent="0" algn="r">
               <a:buNone/>
             </a:pPr>
             <a:r>
@@ -15962,6 +15924,7 @@
         <a:solidFill>
           <a:srgbClr val="FBFBFD"/>
         </a:solidFill>
+        <a:effectLst/>
       </p:bgPr>
     </p:bg>
     <p:spTree>
@@ -15999,7 +15962,7 @@
           <a:bodyPr wrap="square" lIns="0" tIns="0" rIns="0" bIns="0" rtlCol="0" anchor="ctr"/>
           <a:lstStyle/>
           <a:p>
-            <a:pPr indent="0" marL="0">
+            <a:pPr marL="0" indent="0">
               <a:buNone/>
             </a:pPr>
             <a:r>
@@ -16038,7 +16001,7 @@
           <a:bodyPr wrap="square" lIns="0" tIns="0" rIns="0" bIns="0" rtlCol="0" anchor="ctr"/>
           <a:lstStyle/>
           <a:p>
-            <a:pPr indent="0" marL="0">
+            <a:pPr marL="0" indent="0">
               <a:buNone/>
             </a:pPr>
             <a:r>
@@ -16082,7 +16045,7 @@
             <a:prstDash val="solid"/>
           </a:ln>
           <a:effectLst>
-            <a:outerShdw sx="100000" sy="100000" kx="0" ky="0" algn="bl" rotWithShape="0" blurRad="76200" dist="25400" dir="5400000">
+            <a:outerShdw blurRad="76200" dist="25400" dir="5400000" algn="bl" rotWithShape="0">
               <a:srgbClr val="5B6B87">
                 <a:alpha val="18000"/>
               </a:srgbClr>
@@ -16133,7 +16096,7 @@
           <a:bodyPr wrap="square" lIns="0" tIns="0" rIns="0" bIns="0" rtlCol="0" anchor="ctr"/>
           <a:lstStyle/>
           <a:p>
-            <a:pPr indent="0" marL="0">
+            <a:pPr marL="0" indent="0">
               <a:buNone/>
             </a:pPr>
             <a:r>
@@ -16172,7 +16135,7 @@
           <a:bodyPr wrap="square" lIns="0" tIns="0" rIns="0" bIns="0" rtlCol="0" anchor="ctr"/>
           <a:lstStyle/>
           <a:p>
-            <a:pPr algn="r" indent="0" marL="0">
+            <a:pPr marL="0" indent="0" algn="r">
               <a:buNone/>
             </a:pPr>
             <a:r>
@@ -16211,7 +16174,7 @@
           <a:bodyPr wrap="square" lIns="0" tIns="0" rIns="0" bIns="0" rtlCol="0" anchor="ctr"/>
           <a:lstStyle/>
           <a:p>
-            <a:pPr indent="0" marL="0">
+            <a:pPr marL="0" indent="0">
               <a:buNone/>
             </a:pPr>
             <a:r>
@@ -16250,7 +16213,7 @@
           <a:bodyPr wrap="square" lIns="0" tIns="0" rIns="0" bIns="0" rtlCol="0" anchor="ctr"/>
           <a:lstStyle/>
           <a:p>
-            <a:pPr indent="0" marL="0">
+            <a:pPr marL="0" indent="0">
               <a:lnSpc>
                 <a:spcPct val="115000"/>
               </a:lnSpc>
@@ -16319,7 +16282,7 @@
           <a:bodyPr wrap="square" lIns="0" tIns="0" rIns="0" bIns="0" rtlCol="0" anchor="ctr"/>
           <a:lstStyle/>
           <a:p>
-            <a:pPr indent="0" marL="0">
+            <a:pPr marL="0" indent="0">
               <a:buNone/>
             </a:pPr>
             <a:r>
@@ -16358,7 +16321,7 @@
           <a:bodyPr wrap="square" lIns="0" tIns="0" rIns="0" bIns="0" rtlCol="0" anchor="ctr"/>
           <a:lstStyle/>
           <a:p>
-            <a:pPr indent="0" marL="0">
+            <a:pPr marL="0" indent="0">
               <a:lnSpc>
                 <a:spcPct val="110000"/>
               </a:lnSpc>
@@ -16405,7 +16368,7 @@
             <a:prstDash val="solid"/>
           </a:ln>
           <a:effectLst>
-            <a:outerShdw sx="100000" sy="100000" kx="0" ky="0" algn="bl" rotWithShape="0" blurRad="76200" dist="25400" dir="5400000">
+            <a:outerShdw blurRad="76200" dist="25400" dir="5400000" algn="bl" rotWithShape="0">
               <a:srgbClr val="5B6B87">
                 <a:alpha val="18000"/>
               </a:srgbClr>
@@ -16456,7 +16419,7 @@
           <a:bodyPr wrap="square" lIns="0" tIns="0" rIns="0" bIns="0" rtlCol="0" anchor="ctr"/>
           <a:lstStyle/>
           <a:p>
-            <a:pPr indent="0" marL="0">
+            <a:pPr marL="0" indent="0">
               <a:buNone/>
             </a:pPr>
             <a:r>
@@ -16495,7 +16458,7 @@
           <a:bodyPr wrap="square" lIns="0" tIns="0" rIns="0" bIns="0" rtlCol="0" anchor="ctr"/>
           <a:lstStyle/>
           <a:p>
-            <a:pPr algn="r" indent="0" marL="0">
+            <a:pPr marL="0" indent="0" algn="r">
               <a:buNone/>
             </a:pPr>
             <a:r>
@@ -16534,7 +16497,7 @@
           <a:bodyPr wrap="square" lIns="0" tIns="0" rIns="0" bIns="0" rtlCol="0" anchor="ctr"/>
           <a:lstStyle/>
           <a:p>
-            <a:pPr indent="0" marL="0">
+            <a:pPr marL="0" indent="0">
               <a:buNone/>
             </a:pPr>
             <a:r>
@@ -16573,7 +16536,7 @@
           <a:bodyPr wrap="square" lIns="0" tIns="0" rIns="0" bIns="0" rtlCol="0" anchor="ctr"/>
           <a:lstStyle/>
           <a:p>
-            <a:pPr indent="0" marL="0">
+            <a:pPr marL="0" indent="0">
               <a:lnSpc>
                 <a:spcPct val="115000"/>
               </a:lnSpc>
@@ -16642,7 +16605,7 @@
           <a:bodyPr wrap="square" lIns="0" tIns="0" rIns="0" bIns="0" rtlCol="0" anchor="ctr"/>
           <a:lstStyle/>
           <a:p>
-            <a:pPr indent="0" marL="0">
+            <a:pPr marL="0" indent="0">
               <a:buNone/>
             </a:pPr>
             <a:r>
@@ -16681,7 +16644,7 @@
           <a:bodyPr wrap="square" lIns="0" tIns="0" rIns="0" bIns="0" rtlCol="0" anchor="ctr"/>
           <a:lstStyle/>
           <a:p>
-            <a:pPr indent="0" marL="0">
+            <a:pPr marL="0" indent="0">
               <a:buNone/>
             </a:pPr>
             <a:r>
@@ -16720,7 +16683,7 @@
           <a:bodyPr wrap="square" lIns="0" tIns="0" rIns="0" bIns="0" rtlCol="0" anchor="ctr"/>
           <a:lstStyle/>
           <a:p>
-            <a:pPr indent="0" marL="0">
+            <a:pPr marL="0" indent="0">
               <a:buNone/>
             </a:pPr>
             <a:r>
@@ -16759,7 +16722,7 @@
           <a:bodyPr wrap="square" lIns="0" tIns="0" rIns="0" bIns="0" rtlCol="0" anchor="ctr"/>
           <a:lstStyle/>
           <a:p>
-            <a:pPr indent="0" marL="0">
+            <a:pPr marL="0" indent="0">
               <a:buNone/>
             </a:pPr>
             <a:r>
@@ -16798,7 +16761,7 @@
           <a:bodyPr wrap="square" lIns="0" tIns="0" rIns="0" bIns="0" rtlCol="0" anchor="ctr"/>
           <a:lstStyle/>
           <a:p>
-            <a:pPr indent="0" marL="0">
+            <a:pPr marL="0" indent="0">
               <a:buNone/>
             </a:pPr>
             <a:r>
@@ -16837,7 +16800,7 @@
           <a:bodyPr wrap="square" lIns="0" tIns="0" rIns="0" bIns="0" rtlCol="0" anchor="ctr"/>
           <a:lstStyle/>
           <a:p>
-            <a:pPr algn="r" indent="0" marL="0">
+            <a:pPr marL="0" indent="0" algn="r">
               <a:buNone/>
             </a:pPr>
             <a:r>
@@ -16871,6 +16834,7 @@
         <a:solidFill>
           <a:srgbClr val="FBFBFD"/>
         </a:solidFill>
+        <a:effectLst/>
       </p:bgPr>
     </p:bg>
     <p:spTree>
@@ -16908,7 +16872,7 @@
           <a:bodyPr wrap="square" lIns="0" tIns="0" rIns="0" bIns="0" rtlCol="0" anchor="ctr"/>
           <a:lstStyle/>
           <a:p>
-            <a:pPr indent="0" marL="0">
+            <a:pPr marL="0" indent="0">
               <a:buNone/>
             </a:pPr>
             <a:r>
@@ -16947,7 +16911,7 @@
           <a:bodyPr wrap="square" lIns="0" tIns="0" rIns="0" bIns="0" rtlCol="0" anchor="ctr"/>
           <a:lstStyle/>
           <a:p>
-            <a:pPr indent="0" marL="0">
+            <a:pPr marL="0" indent="0">
               <a:buNone/>
             </a:pPr>
             <a:r>
@@ -16991,7 +16955,7 @@
             <a:prstDash val="solid"/>
           </a:ln>
           <a:effectLst>
-            <a:outerShdw sx="100000" sy="100000" kx="0" ky="0" algn="bl" rotWithShape="0" blurRad="76200" dist="25400" dir="5400000">
+            <a:outerShdw blurRad="76200" dist="25400" dir="5400000" algn="bl" rotWithShape="0">
               <a:srgbClr val="5B6B87">
                 <a:alpha val="18000"/>
               </a:srgbClr>
@@ -17020,7 +16984,7 @@
           <a:bodyPr wrap="square" lIns="0" tIns="0" rIns="0" bIns="0" rtlCol="0" anchor="ctr"/>
           <a:lstStyle/>
           <a:p>
-            <a:pPr indent="0" marL="0">
+            <a:pPr marL="0" indent="0">
               <a:buNone/>
             </a:pPr>
             <a:r>
@@ -17059,7 +17023,7 @@
           <a:bodyPr wrap="square" lIns="0" tIns="0" rIns="0" bIns="0" rtlCol="0" anchor="ctr"/>
           <a:lstStyle/>
           <a:p>
-            <a:pPr indent="0" marL="0">
+            <a:pPr marL="0" indent="0">
               <a:buNone/>
             </a:pPr>
             <a:r>
@@ -17122,7 +17086,7 @@
           <a:bodyPr wrap="square" lIns="0" tIns="0" rIns="0" bIns="0" rtlCol="0" anchor="ctr"/>
           <a:lstStyle/>
           <a:p>
-            <a:pPr indent="0" marL="0">
+            <a:pPr marL="0" indent="0">
               <a:buNone/>
             </a:pPr>
             <a:r>
@@ -17185,7 +17149,7 @@
           <a:bodyPr wrap="square" lIns="0" tIns="0" rIns="0" bIns="0" rtlCol="0" anchor="ctr"/>
           <a:lstStyle/>
           <a:p>
-            <a:pPr indent="0" marL="0">
+            <a:pPr marL="0" indent="0">
               <a:buNone/>
             </a:pPr>
             <a:r>
@@ -17248,7 +17212,7 @@
           <a:bodyPr wrap="square" lIns="0" tIns="0" rIns="0" bIns="0" rtlCol="0" anchor="ctr"/>
           <a:lstStyle/>
           <a:p>
-            <a:pPr indent="0" marL="0">
+            <a:pPr marL="0" indent="0">
               <a:buNone/>
             </a:pPr>
             <a:r>
@@ -17311,7 +17275,7 @@
           <a:bodyPr wrap="square" lIns="0" tIns="0" rIns="0" bIns="0" rtlCol="0" anchor="ctr"/>
           <a:lstStyle/>
           <a:p>
-            <a:pPr indent="0" marL="0">
+            <a:pPr marL="0" indent="0">
               <a:buNone/>
             </a:pPr>
             <a:r>
@@ -17403,7 +17367,7 @@
           <a:bodyPr wrap="square" lIns="0" tIns="0" rIns="0" bIns="0" rtlCol="0" anchor="ctr"/>
           <a:lstStyle/>
           <a:p>
-            <a:pPr algn="ctr" indent="0" marL="0">
+            <a:pPr marL="0" indent="0" algn="ctr">
               <a:buNone/>
             </a:pPr>
             <a:r>
@@ -17471,7 +17435,7 @@
             <a:prstDash val="solid"/>
           </a:ln>
           <a:effectLst>
-            <a:outerShdw sx="100000" sy="100000" kx="0" ky="0" algn="bl" rotWithShape="0" blurRad="76200" dist="25400" dir="5400000">
+            <a:outerShdw blurRad="76200" dist="25400" dir="5400000" algn="bl" rotWithShape="0">
               <a:srgbClr val="5B6B87">
                 <a:alpha val="18000"/>
               </a:srgbClr>
@@ -17525,7 +17489,7 @@
           <a:bodyPr wrap="square" lIns="0" tIns="0" rIns="0" bIns="0" rtlCol="0" anchor="ctr"/>
           <a:lstStyle/>
           <a:p>
-            <a:pPr algn="ctr" indent="0" marL="0">
+            <a:pPr marL="0" indent="0" algn="ctr">
               <a:buNone/>
             </a:pPr>
             <a:r>
@@ -17564,7 +17528,7 @@
           <a:bodyPr wrap="square" lIns="0" tIns="0" rIns="0" bIns="0" rtlCol="0" anchor="ctr"/>
           <a:lstStyle/>
           <a:p>
-            <a:pPr indent="0" marL="0">
+            <a:pPr marL="0" indent="0">
               <a:buNone/>
             </a:pPr>
             <a:r>
@@ -17603,7 +17567,7 @@
           <a:bodyPr wrap="square" lIns="0" tIns="0" rIns="0" bIns="0" rtlCol="0" anchor="ctr"/>
           <a:lstStyle/>
           <a:p>
-            <a:pPr indent="0" marL="0">
+            <a:pPr marL="0" indent="0">
               <a:lnSpc>
                 <a:spcPct val="115000"/>
               </a:lnSpc>
@@ -17650,7 +17614,7 @@
             <a:prstDash val="solid"/>
           </a:ln>
           <a:effectLst>
-            <a:outerShdw sx="100000" sy="100000" kx="0" ky="0" algn="bl" rotWithShape="0" blurRad="76200" dist="25400" dir="5400000">
+            <a:outerShdw blurRad="76200" dist="25400" dir="5400000" algn="bl" rotWithShape="0">
               <a:srgbClr val="5B6B87">
                 <a:alpha val="18000"/>
               </a:srgbClr>
@@ -17704,7 +17668,7 @@
           <a:bodyPr wrap="square" lIns="0" tIns="0" rIns="0" bIns="0" rtlCol="0" anchor="ctr"/>
           <a:lstStyle/>
           <a:p>
-            <a:pPr algn="ctr" indent="0" marL="0">
+            <a:pPr marL="0" indent="0" algn="ctr">
               <a:buNone/>
             </a:pPr>
             <a:r>
@@ -17743,7 +17707,7 @@
           <a:bodyPr wrap="square" lIns="0" tIns="0" rIns="0" bIns="0" rtlCol="0" anchor="ctr"/>
           <a:lstStyle/>
           <a:p>
-            <a:pPr indent="0" marL="0">
+            <a:pPr marL="0" indent="0">
               <a:buNone/>
             </a:pPr>
             <a:r>
@@ -17782,7 +17746,7 @@
           <a:bodyPr wrap="square" lIns="0" tIns="0" rIns="0" bIns="0" rtlCol="0" anchor="ctr"/>
           <a:lstStyle/>
           <a:p>
-            <a:pPr indent="0" marL="0">
+            <a:pPr marL="0" indent="0">
               <a:lnSpc>
                 <a:spcPct val="115000"/>
               </a:lnSpc>
@@ -17824,7 +17788,7 @@
           <a:bodyPr wrap="square" lIns="0" tIns="0" rIns="0" bIns="0" rtlCol="0" anchor="ctr"/>
           <a:lstStyle/>
           <a:p>
-            <a:pPr indent="0" marL="0">
+            <a:pPr marL="0" indent="0">
               <a:lnSpc>
                 <a:spcPct val="110000"/>
               </a:lnSpc>
@@ -17866,7 +17830,7 @@
           <a:bodyPr wrap="square" lIns="0" tIns="0" rIns="0" bIns="0" rtlCol="0" anchor="ctr"/>
           <a:lstStyle/>
           <a:p>
-            <a:pPr indent="0" marL="0">
+            <a:pPr marL="0" indent="0">
               <a:buNone/>
             </a:pPr>
             <a:r>
@@ -17905,7 +17869,7 @@
           <a:bodyPr wrap="square" lIns="0" tIns="0" rIns="0" bIns="0" rtlCol="0" anchor="ctr"/>
           <a:lstStyle/>
           <a:p>
-            <a:pPr algn="r" indent="0" marL="0">
+            <a:pPr marL="0" indent="0" algn="r">
               <a:buNone/>
             </a:pPr>
             <a:r>
@@ -18224,4 +18188,299 @@
     </a:ext>
   </a:extLst>
 </a:theme>
+</file>
+
+<file path=ppt/theme/theme2.xml><?xml version="1.0" encoding="utf-8"?>
+<a:theme xmlns:a="http://schemas.openxmlformats.org/drawingml/2006/main" name="Office Theme">
+  <a:themeElements>
+    <a:clrScheme name="Office">
+      <a:dk1>
+        <a:sysClr val="windowText" lastClr="000000"/>
+      </a:dk1>
+      <a:lt1>
+        <a:sysClr val="window" lastClr="FFFFFF"/>
+      </a:lt1>
+      <a:dk2>
+        <a:srgbClr val="44546A"/>
+      </a:dk2>
+      <a:lt2>
+        <a:srgbClr val="E7E6E6"/>
+      </a:lt2>
+      <a:accent1>
+        <a:srgbClr val="4472C4"/>
+      </a:accent1>
+      <a:accent2>
+        <a:srgbClr val="ED7D31"/>
+      </a:accent2>
+      <a:accent3>
+        <a:srgbClr val="A5A5A5"/>
+      </a:accent3>
+      <a:accent4>
+        <a:srgbClr val="FFC000"/>
+      </a:accent4>
+      <a:accent5>
+        <a:srgbClr val="5B9BD5"/>
+      </a:accent5>
+      <a:accent6>
+        <a:srgbClr val="70AD47"/>
+      </a:accent6>
+      <a:hlink>
+        <a:srgbClr val="0563C1"/>
+      </a:hlink>
+      <a:folHlink>
+        <a:srgbClr val="954F72"/>
+      </a:folHlink>
+    </a:clrScheme>
+    <a:fontScheme name="Office">
+      <a:majorFont>
+        <a:latin typeface="Calibri Light" panose="020F0302020204030204"/>
+        <a:ea typeface=""/>
+        <a:cs typeface=""/>
+        <a:font script="Jpan" typeface="游ゴシック Light"/>
+        <a:font script="Hang" typeface="맑은 고딕"/>
+        <a:font script="Hans" typeface="等线 Light"/>
+        <a:font script="Hant" typeface="新細明體"/>
+        <a:font script="Arab" typeface="Times New Roman"/>
+        <a:font script="Hebr" typeface="Times New Roman"/>
+        <a:font script="Thai" typeface="Angsana New"/>
+        <a:font script="Ethi" typeface="Nyala"/>
+        <a:font script="Beng" typeface="Vrinda"/>
+        <a:font script="Gujr" typeface="Shruti"/>
+        <a:font script="Khmr" typeface="MoolBoran"/>
+        <a:font script="Knda" typeface="Tunga"/>
+        <a:font script="Guru" typeface="Raavi"/>
+        <a:font script="Cans" typeface="Euphemia"/>
+        <a:font script="Cher" typeface="Plantagenet Cherokee"/>
+        <a:font script="Yiii" typeface="Microsoft Yi Baiti"/>
+        <a:font script="Tibt" typeface="Microsoft Himalaya"/>
+        <a:font script="Thaa" typeface="MV Boli"/>
+        <a:font script="Deva" typeface="Mangal"/>
+        <a:font script="Telu" typeface="Gautami"/>
+        <a:font script="Taml" typeface="Latha"/>
+        <a:font script="Syrc" typeface="Estrangelo Edessa"/>
+        <a:font script="Orya" typeface="Kalinga"/>
+        <a:font script="Mlym" typeface="Kartika"/>
+        <a:font script="Laoo" typeface="DokChampa"/>
+        <a:font script="Sinh" typeface="Iskoola Pota"/>
+        <a:font script="Mong" typeface="Mongolian Baiti"/>
+        <a:font script="Viet" typeface="Times New Roman"/>
+        <a:font script="Uigh" typeface="Microsoft Uighur"/>
+        <a:font script="Geor" typeface="Sylfaen"/>
+        <a:font script="Armn" typeface="Arial"/>
+        <a:font script="Bugi" typeface="Leelawadee UI"/>
+        <a:font script="Bopo" typeface="Microsoft JhengHei"/>
+        <a:font script="Java" typeface="Javanese Text"/>
+        <a:font script="Lisu" typeface="Segoe UI"/>
+        <a:font script="Mymr" typeface="Myanmar Text"/>
+        <a:font script="Nkoo" typeface="Ebrima"/>
+        <a:font script="Olck" typeface="Nirmala UI"/>
+        <a:font script="Osma" typeface="Ebrima"/>
+        <a:font script="Phag" typeface="Phagspa"/>
+        <a:font script="Syrn" typeface="Estrangelo Edessa"/>
+        <a:font script="Syrj" typeface="Estrangelo Edessa"/>
+        <a:font script="Syre" typeface="Estrangelo Edessa"/>
+        <a:font script="Sora" typeface="Nirmala UI"/>
+        <a:font script="Tale" typeface="Microsoft Tai Le"/>
+        <a:font script="Talu" typeface="Microsoft New Tai Lue"/>
+        <a:font script="Tfng" typeface="Ebrima"/>
+      </a:majorFont>
+      <a:minorFont>
+        <a:latin typeface="Calibri" panose="020F0502020204030204"/>
+        <a:ea typeface=""/>
+        <a:cs typeface=""/>
+        <a:font script="Jpan" typeface="游ゴシック"/>
+        <a:font script="Hang" typeface="맑은 고딕"/>
+        <a:font script="Hans" typeface="等线"/>
+        <a:font script="Hant" typeface="新細明體"/>
+        <a:font script="Arab" typeface="Arial"/>
+        <a:font script="Hebr" typeface="Arial"/>
+        <a:font script="Thai" typeface="Cordia New"/>
+        <a:font script="Ethi" typeface="Nyala"/>
+        <a:font script="Beng" typeface="Vrinda"/>
+        <a:font script="Gujr" typeface="Shruti"/>
+        <a:font script="Khmr" typeface="DaunPenh"/>
+        <a:font script="Knda" typeface="Tunga"/>
+        <a:font script="Guru" typeface="Raavi"/>
+        <a:font script="Cans" typeface="Euphemia"/>
+        <a:font script="Cher" typeface="Plantagenet Cherokee"/>
+        <a:font script="Yiii" typeface="Microsoft Yi Baiti"/>
+        <a:font script="Tibt" typeface="Microsoft Himalaya"/>
+        <a:font script="Thaa" typeface="MV Boli"/>
+        <a:font script="Deva" typeface="Mangal"/>
+        <a:font script="Telu" typeface="Gautami"/>
+        <a:font script="Taml" typeface="Latha"/>
+        <a:font script="Syrc" typeface="Estrangelo Edessa"/>
+        <a:font script="Orya" typeface="Kalinga"/>
+        <a:font script="Mlym" typeface="Kartika"/>
+        <a:font script="Laoo" typeface="DokChampa"/>
+        <a:font script="Sinh" typeface="Iskoola Pota"/>
+        <a:font script="Mong" typeface="Mongolian Baiti"/>
+        <a:font script="Viet" typeface="Arial"/>
+        <a:font script="Uigh" typeface="Microsoft Uighur"/>
+        <a:font script="Geor" typeface="Sylfaen"/>
+        <a:font script="Armn" typeface="Arial"/>
+        <a:font script="Bugi" typeface="Leelawadee UI"/>
+        <a:font script="Bopo" typeface="Microsoft JhengHei"/>
+        <a:font script="Java" typeface="Javanese Text"/>
+        <a:font script="Lisu" typeface="Segoe UI"/>
+        <a:font script="Mymr" typeface="Myanmar Text"/>
+        <a:font script="Nkoo" typeface="Ebrima"/>
+        <a:font script="Olck" typeface="Nirmala UI"/>
+        <a:font script="Osma" typeface="Ebrima"/>
+        <a:font script="Phag" typeface="Phagspa"/>
+        <a:font script="Syrn" typeface="Estrangelo Edessa"/>
+        <a:font script="Syrj" typeface="Estrangelo Edessa"/>
+        <a:font script="Syre" typeface="Estrangelo Edessa"/>
+        <a:font script="Sora" typeface="Nirmala UI"/>
+        <a:font script="Tale" typeface="Microsoft Tai Le"/>
+        <a:font script="Talu" typeface="Microsoft New Tai Lue"/>
+        <a:font script="Tfng" typeface="Ebrima"/>
+      </a:minorFont>
+    </a:fontScheme>
+    <a:fmtScheme name="Office">
+      <a:fillStyleLst>
+        <a:solidFill>
+          <a:schemeClr val="phClr"/>
+        </a:solidFill>
+        <a:gradFill rotWithShape="1">
+          <a:gsLst>
+            <a:gs pos="0">
+              <a:schemeClr val="phClr">
+                <a:lumMod val="110000"/>
+                <a:satMod val="105000"/>
+                <a:tint val="67000"/>
+              </a:schemeClr>
+            </a:gs>
+            <a:gs pos="50000">
+              <a:schemeClr val="phClr">
+                <a:lumMod val="105000"/>
+                <a:satMod val="103000"/>
+                <a:tint val="73000"/>
+              </a:schemeClr>
+            </a:gs>
+            <a:gs pos="100000">
+              <a:schemeClr val="phClr">
+                <a:lumMod val="105000"/>
+                <a:satMod val="109000"/>
+                <a:tint val="81000"/>
+              </a:schemeClr>
+            </a:gs>
+          </a:gsLst>
+          <a:lin ang="5400000" scaled="0"/>
+        </a:gradFill>
+        <a:gradFill rotWithShape="1">
+          <a:gsLst>
+            <a:gs pos="0">
+              <a:schemeClr val="phClr">
+                <a:satMod val="103000"/>
+                <a:lumMod val="102000"/>
+                <a:tint val="94000"/>
+              </a:schemeClr>
+            </a:gs>
+            <a:gs pos="50000">
+              <a:schemeClr val="phClr">
+                <a:satMod val="110000"/>
+                <a:lumMod val="100000"/>
+                <a:shade val="100000"/>
+              </a:schemeClr>
+            </a:gs>
+            <a:gs pos="100000">
+              <a:schemeClr val="phClr">
+                <a:lumMod val="99000"/>
+                <a:satMod val="120000"/>
+                <a:shade val="78000"/>
+              </a:schemeClr>
+            </a:gs>
+          </a:gsLst>
+          <a:lin ang="5400000" scaled="0"/>
+        </a:gradFill>
+      </a:fillStyleLst>
+      <a:lnStyleLst>
+        <a:ln w="6350" cap="flat" cmpd="sng" algn="ctr">
+          <a:solidFill>
+            <a:schemeClr val="phClr"/>
+          </a:solidFill>
+          <a:prstDash val="solid"/>
+          <a:miter lim="800000"/>
+        </a:ln>
+        <a:ln w="12700" cap="flat" cmpd="sng" algn="ctr">
+          <a:solidFill>
+            <a:schemeClr val="phClr"/>
+          </a:solidFill>
+          <a:prstDash val="solid"/>
+          <a:miter lim="800000"/>
+        </a:ln>
+        <a:ln w="19050" cap="flat" cmpd="sng" algn="ctr">
+          <a:solidFill>
+            <a:schemeClr val="phClr"/>
+          </a:solidFill>
+          <a:prstDash val="solid"/>
+          <a:miter lim="800000"/>
+        </a:ln>
+      </a:lnStyleLst>
+      <a:effectStyleLst>
+        <a:effectStyle>
+          <a:effectLst/>
+        </a:effectStyle>
+        <a:effectStyle>
+          <a:effectLst/>
+        </a:effectStyle>
+        <a:effectStyle>
+          <a:effectLst>
+            <a:outerShdw blurRad="57150" dist="19050" dir="5400000" algn="ctr" rotWithShape="0">
+              <a:srgbClr val="000000">
+                <a:alpha val="63000"/>
+              </a:srgbClr>
+            </a:outerShdw>
+          </a:effectLst>
+        </a:effectStyle>
+      </a:effectStyleLst>
+      <a:bgFillStyleLst>
+        <a:solidFill>
+          <a:schemeClr val="phClr"/>
+        </a:solidFill>
+        <a:solidFill>
+          <a:schemeClr val="phClr">
+            <a:tint val="95000"/>
+            <a:satMod val="170000"/>
+          </a:schemeClr>
+        </a:solidFill>
+        <a:gradFill rotWithShape="1">
+          <a:gsLst>
+            <a:gs pos="0">
+              <a:schemeClr val="phClr">
+                <a:tint val="93000"/>
+                <a:satMod val="150000"/>
+                <a:shade val="98000"/>
+                <a:lumMod val="102000"/>
+              </a:schemeClr>
+            </a:gs>
+            <a:gs pos="50000">
+              <a:schemeClr val="phClr">
+                <a:tint val="98000"/>
+                <a:satMod val="130000"/>
+                <a:shade val="90000"/>
+                <a:lumMod val="103000"/>
+              </a:schemeClr>
+            </a:gs>
+            <a:gs pos="100000">
+              <a:schemeClr val="phClr">
+                <a:shade val="63000"/>
+                <a:satMod val="120000"/>
+              </a:schemeClr>
+            </a:gs>
+          </a:gsLst>
+          <a:lin ang="5400000" scaled="0"/>
+        </a:gradFill>
+      </a:bgFillStyleLst>
+    </a:fmtScheme>
+  </a:themeElements>
+  <a:objectDefaults/>
+  <a:extraClrSchemeLst/>
+  <a:extLst>
+    <a:ext uri="{05A4C25C-085E-4340-85A3-A5531E510DB2}">
+      <thm15:themeFamily xmlns:thm15="http://schemas.microsoft.com/office/thememl/2012/main" name="Office Theme" id="{62F939B6-93AF-4DB8-9C6B-D6C7DFDC589F}" vid="{4A3C46E8-61CC-4603-A589-7422A47A8E4A}"/>
+    </a:ext>
+  </a:extLst>
+</a:theme>
 </file>